--- a/thesis proposal 7_20.pptx
+++ b/thesis proposal 7_20.pptx
@@ -13283,6 +13283,19 @@
           <a:p>
             <a:r>
               <a:rPr lang="en-US" altLang="zh-TW" dirty="0"/>
+              <a:t>Define risk scoring and score-to-threshold mapping</a:t>
+            </a:r>
+          </a:p>
+          <a:p>
+            <a:pPr lvl="1"/>
+            <a:r>
+              <a:rPr lang="en-US" altLang="zh-TW" dirty="0"/>
+              <a:t> Reinforcement learning?</a:t>
+            </a:r>
+          </a:p>
+          <a:p>
+            <a:r>
+              <a:rPr lang="en-US" altLang="zh-TW" dirty="0"/>
               <a:t>Adopt other MUSIC variant for AoA estimation</a:t>
             </a:r>
           </a:p>
@@ -13290,19 +13303,6 @@
             <a:r>
               <a:rPr lang="en-US" altLang="zh-TW" dirty="0"/>
               <a:t>Speed up MUSIC </a:t>
-            </a:r>
-          </a:p>
-          <a:p>
-            <a:r>
-              <a:rPr lang="en-US" altLang="zh-TW" dirty="0"/>
-              <a:t>Define risk scoring and score-to-threshold mapping</a:t>
-            </a:r>
-          </a:p>
-          <a:p>
-            <a:pPr lvl="1"/>
-            <a:r>
-              <a:rPr lang="en-US" altLang="zh-TW" dirty="0"/>
-              <a:t> Reinforcement learning?</a:t>
             </a:r>
           </a:p>
           <a:p>

--- a/thesis proposal 7_20.pptx
+++ b/thesis proposal 7_20.pptx
@@ -9948,11 +9948,20 @@
           </a:p>
           <a:p>
             <a:r>
+              <a:rPr lang="zh-TW" altLang="zh-TW" dirty="0"/>
+              <a:t>CSI is estimated from a known pattern</a:t>
+            </a:r>
+            <a:endParaRPr lang="en-US" altLang="zh-TW" dirty="0"/>
+          </a:p>
+          <a:p>
+            <a:pPr lvl="1"/>
+            <a:r>
               <a:rPr lang="en-US" altLang="zh-TW" dirty="0"/>
               <a:t>Sender transmits a pattern known to receiver</a:t>
             </a:r>
           </a:p>
           <a:p>
+            <a:pPr lvl="1"/>
             <a:r>
               <a:rPr lang="en-US" altLang="zh-TW" dirty="0"/>
               <a:t>Receiver estimates CSI from received pattern</a:t>
@@ -9974,7 +9983,7 @@
         </p:nvGrpSpPr>
         <p:grpSpPr>
           <a:xfrm>
-            <a:off x="1984109" y="3488866"/>
+            <a:off x="1984109" y="3928599"/>
             <a:ext cx="8223781" cy="1892997"/>
             <a:chOff x="1422748" y="4073235"/>
             <a:chExt cx="8223781" cy="1892997"/>

--- a/thesis proposal 7_20.pptx
+++ b/thesis proposal 7_20.pptx
@@ -471,11 +471,6 @@
         </p:txBody>
       </p:sp>
     </p:spTree>
-    <p:extLst>
-      <p:ext uri="{BB962C8B-B14F-4D97-AF65-F5344CB8AC3E}">
-        <p14:creationId xmlns:p14="http://schemas.microsoft.com/office/powerpoint/2010/main" val="1608574538"/>
-      </p:ext>
-    </p:extLst>
   </p:cSld>
   <p:clrMapOvr>
     <a:masterClrMapping/>
@@ -484,1584 +479,6 @@
 </file>
 
 <file path=ppt/notesSlides/notesSlide11.xml><?xml version="1.0" encoding="utf-8"?>
-<p:notes xmlns:a="http://schemas.openxmlformats.org/drawingml/2006/main" xmlns:r="http://schemas.openxmlformats.org/officeDocument/2006/relationships" xmlns:p="http://schemas.openxmlformats.org/presentationml/2006/main">
-  <p:cSld>
-    <p:spTree>
-      <p:nvGrpSpPr>
-        <p:cNvPr id="1" name=""/>
-        <p:cNvGrpSpPr/>
-        <p:nvPr/>
-      </p:nvGrpSpPr>
-      <p:grpSpPr>
-        <a:xfrm>
-          <a:off x="0" y="0"/>
-          <a:ext cx="0" cy="0"/>
-          <a:chOff x="0" y="0"/>
-          <a:chExt cx="0" cy="0"/>
-        </a:xfrm>
-      </p:grpSpPr>
-      <p:sp>
-        <p:nvSpPr>
-          <p:cNvPr id="2" name="Slide Image Placeholder 1"/>
-          <p:cNvSpPr>
-            <a:spLocks noGrp="1" noRot="1" noChangeAspect="1"/>
-          </p:cNvSpPr>
-          <p:nvPr>
-            <p:ph type="sldImg"/>
-          </p:nvPr>
-        </p:nvSpPr>
-        <p:spPr/>
-        <p:txBody>
-          <a:bodyPr/>
-          <a:lstStyle/>
-          <a:p>
-            <a:endParaRPr lang="zh-TW" altLang="en-US"/>
-          </a:p>
-        </p:txBody>
-      </p:sp>
-      <p:sp>
-        <p:nvSpPr>
-          <p:cNvPr id="3" name="Notes Placeholder 2"/>
-          <p:cNvSpPr>
-            <a:spLocks noGrp="1"/>
-          </p:cNvSpPr>
-          <p:nvPr>
-            <p:ph type="body" idx="1"/>
-          </p:nvPr>
-        </p:nvSpPr>
-        <p:spPr/>
-        <p:txBody>
-          <a:bodyPr/>
-          <a:lstStyle/>
-          <a:p>
-            <a:endParaRPr/>
-          </a:p>
-        </p:txBody>
-      </p:sp>
-      <p:sp>
-        <p:nvSpPr>
-          <p:cNvPr id="4" name="Slide Number Placeholder 3"/>
-          <p:cNvSpPr>
-            <a:spLocks noGrp="1"/>
-          </p:cNvSpPr>
-          <p:nvPr>
-            <p:ph type="sldNum" idx="5"/>
-          </p:nvPr>
-        </p:nvSpPr>
-        <p:spPr/>
-        <p:txBody>
-          <a:bodyPr/>
-          <a:lstStyle/>
-          <a:p>
-            <a:endParaRPr/>
-          </a:p>
-        </p:txBody>
-      </p:sp>
-    </p:spTree>
-  </p:cSld>
-  <p:clrMapOvr>
-    <a:masterClrMapping/>
-  </p:clrMapOvr>
-</p:notes>
-</file>
-
-<file path=ppt/notesSlides/notesSlide12.xml><?xml version="1.0" encoding="utf-8"?>
-<p:notes xmlns:a="http://schemas.openxmlformats.org/drawingml/2006/main" xmlns:r="http://schemas.openxmlformats.org/officeDocument/2006/relationships" xmlns:p="http://schemas.openxmlformats.org/presentationml/2006/main">
-  <p:cSld>
-    <p:spTree>
-      <p:nvGrpSpPr>
-        <p:cNvPr id="1" name=""/>
-        <p:cNvGrpSpPr/>
-        <p:nvPr/>
-      </p:nvGrpSpPr>
-      <p:grpSpPr>
-        <a:xfrm>
-          <a:off x="0" y="0"/>
-          <a:ext cx="0" cy="0"/>
-          <a:chOff x="0" y="0"/>
-          <a:chExt cx="0" cy="0"/>
-        </a:xfrm>
-      </p:grpSpPr>
-      <p:sp>
-        <p:nvSpPr>
-          <p:cNvPr id="2" name="Slide Image Placeholder 1"/>
-          <p:cNvSpPr>
-            <a:spLocks noGrp="1" noRot="1" noChangeAspect="1"/>
-          </p:cNvSpPr>
-          <p:nvPr>
-            <p:ph type="sldImg"/>
-          </p:nvPr>
-        </p:nvSpPr>
-        <p:spPr/>
-        <p:txBody>
-          <a:bodyPr/>
-          <a:lstStyle/>
-          <a:p>
-            <a:endParaRPr lang="zh-TW" altLang="en-US"/>
-          </a:p>
-        </p:txBody>
-      </p:sp>
-      <p:sp>
-        <p:nvSpPr>
-          <p:cNvPr id="3" name="Notes Placeholder 2"/>
-          <p:cNvSpPr>
-            <a:spLocks noGrp="1"/>
-          </p:cNvSpPr>
-          <p:nvPr>
-            <p:ph type="body" idx="1"/>
-          </p:nvPr>
-        </p:nvSpPr>
-        <p:spPr/>
-        <p:txBody>
-          <a:bodyPr/>
-          <a:lstStyle/>
-          <a:p>
-            <a:endParaRPr/>
-          </a:p>
-        </p:txBody>
-      </p:sp>
-      <p:sp>
-        <p:nvSpPr>
-          <p:cNvPr id="4" name="Slide Number Placeholder 3"/>
-          <p:cNvSpPr>
-            <a:spLocks noGrp="1"/>
-          </p:cNvSpPr>
-          <p:nvPr>
-            <p:ph type="sldNum" idx="5"/>
-          </p:nvPr>
-        </p:nvSpPr>
-        <p:spPr/>
-        <p:txBody>
-          <a:bodyPr/>
-          <a:lstStyle/>
-          <a:p>
-            <a:endParaRPr/>
-          </a:p>
-        </p:txBody>
-      </p:sp>
-    </p:spTree>
-    <p:extLst>
-      <p:ext uri="{BB962C8B-B14F-4D97-AF65-F5344CB8AC3E}">
-        <p14:creationId xmlns:p14="http://schemas.microsoft.com/office/powerpoint/2010/main" val="3072388332"/>
-      </p:ext>
-    </p:extLst>
-  </p:cSld>
-  <p:clrMapOvr>
-    <a:masterClrMapping/>
-  </p:clrMapOvr>
-</p:notes>
-</file>
-
-<file path=ppt/notesSlides/notesSlide13.xml><?xml version="1.0" encoding="utf-8"?>
-<p:notes xmlns:a="http://schemas.openxmlformats.org/drawingml/2006/main" xmlns:r="http://schemas.openxmlformats.org/officeDocument/2006/relationships" xmlns:p="http://schemas.openxmlformats.org/presentationml/2006/main">
-  <p:cSld>
-    <p:spTree>
-      <p:nvGrpSpPr>
-        <p:cNvPr id="1" name=""/>
-        <p:cNvGrpSpPr/>
-        <p:nvPr/>
-      </p:nvGrpSpPr>
-      <p:grpSpPr>
-        <a:xfrm>
-          <a:off x="0" y="0"/>
-          <a:ext cx="0" cy="0"/>
-          <a:chOff x="0" y="0"/>
-          <a:chExt cx="0" cy="0"/>
-        </a:xfrm>
-      </p:grpSpPr>
-      <p:sp>
-        <p:nvSpPr>
-          <p:cNvPr id="2" name="Slide Image Placeholder 1"/>
-          <p:cNvSpPr>
-            <a:spLocks noGrp="1" noRot="1" noChangeAspect="1"/>
-          </p:cNvSpPr>
-          <p:nvPr>
-            <p:ph type="sldImg"/>
-          </p:nvPr>
-        </p:nvSpPr>
-        <p:spPr/>
-        <p:txBody>
-          <a:bodyPr/>
-          <a:lstStyle/>
-          <a:p>
-            <a:endParaRPr lang="zh-TW" altLang="en-US"/>
-          </a:p>
-        </p:txBody>
-      </p:sp>
-      <p:sp>
-        <p:nvSpPr>
-          <p:cNvPr id="3" name="Notes Placeholder 2"/>
-          <p:cNvSpPr>
-            <a:spLocks noGrp="1"/>
-          </p:cNvSpPr>
-          <p:nvPr>
-            <p:ph type="body" idx="1"/>
-          </p:nvPr>
-        </p:nvSpPr>
-        <p:spPr/>
-        <p:txBody>
-          <a:bodyPr/>
-          <a:lstStyle/>
-          <a:p>
-            <a:endParaRPr/>
-          </a:p>
-        </p:txBody>
-      </p:sp>
-      <p:sp>
-        <p:nvSpPr>
-          <p:cNvPr id="4" name="Slide Number Placeholder 3"/>
-          <p:cNvSpPr>
-            <a:spLocks noGrp="1"/>
-          </p:cNvSpPr>
-          <p:nvPr>
-            <p:ph type="sldNum" idx="5"/>
-          </p:nvPr>
-        </p:nvSpPr>
-        <p:spPr/>
-        <p:txBody>
-          <a:bodyPr/>
-          <a:lstStyle/>
-          <a:p>
-            <a:endParaRPr/>
-          </a:p>
-        </p:txBody>
-      </p:sp>
-    </p:spTree>
-  </p:cSld>
-  <p:clrMapOvr>
-    <a:masterClrMapping/>
-  </p:clrMapOvr>
-</p:notes>
-</file>
-
-<file path=ppt/notesSlides/notesSlide14.xml><?xml version="1.0" encoding="utf-8"?>
-<p:notes xmlns:a="http://schemas.openxmlformats.org/drawingml/2006/main" xmlns:r="http://schemas.openxmlformats.org/officeDocument/2006/relationships" xmlns:p="http://schemas.openxmlformats.org/presentationml/2006/main">
-  <p:cSld>
-    <p:spTree>
-      <p:nvGrpSpPr>
-        <p:cNvPr id="1" name=""/>
-        <p:cNvGrpSpPr/>
-        <p:nvPr/>
-      </p:nvGrpSpPr>
-      <p:grpSpPr>
-        <a:xfrm>
-          <a:off x="0" y="0"/>
-          <a:ext cx="0" cy="0"/>
-          <a:chOff x="0" y="0"/>
-          <a:chExt cx="0" cy="0"/>
-        </a:xfrm>
-      </p:grpSpPr>
-      <p:sp>
-        <p:nvSpPr>
-          <p:cNvPr id="2" name="Slide Image Placeholder 1"/>
-          <p:cNvSpPr>
-            <a:spLocks noGrp="1" noRot="1" noChangeAspect="1"/>
-          </p:cNvSpPr>
-          <p:nvPr>
-            <p:ph type="sldImg"/>
-          </p:nvPr>
-        </p:nvSpPr>
-        <p:spPr/>
-        <p:txBody>
-          <a:bodyPr/>
-          <a:lstStyle/>
-          <a:p>
-            <a:endParaRPr lang="zh-TW" altLang="en-US"/>
-          </a:p>
-        </p:txBody>
-      </p:sp>
-      <p:sp>
-        <p:nvSpPr>
-          <p:cNvPr id="3" name="Notes Placeholder 2"/>
-          <p:cNvSpPr>
-            <a:spLocks noGrp="1"/>
-          </p:cNvSpPr>
-          <p:nvPr>
-            <p:ph type="body" idx="1"/>
-          </p:nvPr>
-        </p:nvSpPr>
-        <p:spPr/>
-        <p:txBody>
-          <a:bodyPr/>
-          <a:lstStyle/>
-          <a:p>
-            <a:endParaRPr/>
-          </a:p>
-        </p:txBody>
-      </p:sp>
-      <p:sp>
-        <p:nvSpPr>
-          <p:cNvPr id="4" name="Slide Number Placeholder 3"/>
-          <p:cNvSpPr>
-            <a:spLocks noGrp="1"/>
-          </p:cNvSpPr>
-          <p:nvPr>
-            <p:ph type="sldNum" idx="5"/>
-          </p:nvPr>
-        </p:nvSpPr>
-        <p:spPr/>
-        <p:txBody>
-          <a:bodyPr/>
-          <a:lstStyle/>
-          <a:p>
-            <a:endParaRPr/>
-          </a:p>
-        </p:txBody>
-      </p:sp>
-    </p:spTree>
-  </p:cSld>
-  <p:clrMapOvr>
-    <a:masterClrMapping/>
-  </p:clrMapOvr>
-</p:notes>
-</file>
-
-<file path=ppt/notesSlides/notesSlide15.xml><?xml version="1.0" encoding="utf-8"?>
-<p:notes xmlns:a="http://schemas.openxmlformats.org/drawingml/2006/main" xmlns:r="http://schemas.openxmlformats.org/officeDocument/2006/relationships" xmlns:p="http://schemas.openxmlformats.org/presentationml/2006/main">
-  <p:cSld>
-    <p:spTree>
-      <p:nvGrpSpPr>
-        <p:cNvPr id="1" name=""/>
-        <p:cNvGrpSpPr/>
-        <p:nvPr/>
-      </p:nvGrpSpPr>
-      <p:grpSpPr>
-        <a:xfrm>
-          <a:off x="0" y="0"/>
-          <a:ext cx="0" cy="0"/>
-          <a:chOff x="0" y="0"/>
-          <a:chExt cx="0" cy="0"/>
-        </a:xfrm>
-      </p:grpSpPr>
-      <p:sp>
-        <p:nvSpPr>
-          <p:cNvPr id="2" name="Slide Image Placeholder 1"/>
-          <p:cNvSpPr>
-            <a:spLocks noGrp="1" noRot="1" noChangeAspect="1"/>
-          </p:cNvSpPr>
-          <p:nvPr>
-            <p:ph type="sldImg"/>
-          </p:nvPr>
-        </p:nvSpPr>
-        <p:spPr/>
-        <p:txBody>
-          <a:bodyPr/>
-          <a:lstStyle/>
-          <a:p>
-            <a:endParaRPr lang="zh-TW" altLang="en-US"/>
-          </a:p>
-        </p:txBody>
-      </p:sp>
-      <p:sp>
-        <p:nvSpPr>
-          <p:cNvPr id="3" name="Notes Placeholder 2"/>
-          <p:cNvSpPr>
-            <a:spLocks noGrp="1"/>
-          </p:cNvSpPr>
-          <p:nvPr>
-            <p:ph type="body" idx="1"/>
-          </p:nvPr>
-        </p:nvSpPr>
-        <p:spPr/>
-        <p:txBody>
-          <a:bodyPr/>
-          <a:lstStyle/>
-          <a:p>
-            <a:endParaRPr/>
-          </a:p>
-        </p:txBody>
-      </p:sp>
-      <p:sp>
-        <p:nvSpPr>
-          <p:cNvPr id="4" name="Slide Number Placeholder 3"/>
-          <p:cNvSpPr>
-            <a:spLocks noGrp="1"/>
-          </p:cNvSpPr>
-          <p:nvPr>
-            <p:ph type="sldNum" idx="5"/>
-          </p:nvPr>
-        </p:nvSpPr>
-        <p:spPr/>
-        <p:txBody>
-          <a:bodyPr/>
-          <a:lstStyle/>
-          <a:p>
-            <a:endParaRPr/>
-          </a:p>
-        </p:txBody>
-      </p:sp>
-    </p:spTree>
-  </p:cSld>
-  <p:clrMapOvr>
-    <a:masterClrMapping/>
-  </p:clrMapOvr>
-</p:notes>
-</file>
-
-<file path=ppt/notesSlides/notesSlide16.xml><?xml version="1.0" encoding="utf-8"?>
-<p:notes xmlns:a="http://schemas.openxmlformats.org/drawingml/2006/main" xmlns:r="http://schemas.openxmlformats.org/officeDocument/2006/relationships" xmlns:p="http://schemas.openxmlformats.org/presentationml/2006/main">
-  <p:cSld>
-    <p:spTree>
-      <p:nvGrpSpPr>
-        <p:cNvPr id="1" name="">
-          <a:extLst>
-            <a:ext uri="{FF2B5EF4-FFF2-40B4-BE49-F238E27FC236}">
-              <a16:creationId xmlns:a16="http://schemas.microsoft.com/office/drawing/2014/main" id="{C7C28AFD-031B-0436-DE48-43D141BD1D37}"/>
-            </a:ext>
-          </a:extLst>
-        </p:cNvPr>
-        <p:cNvGrpSpPr/>
-        <p:nvPr/>
-      </p:nvGrpSpPr>
-      <p:grpSpPr>
-        <a:xfrm>
-          <a:off x="0" y="0"/>
-          <a:ext cx="0" cy="0"/>
-          <a:chOff x="0" y="0"/>
-          <a:chExt cx="0" cy="0"/>
-        </a:xfrm>
-      </p:grpSpPr>
-      <p:sp>
-        <p:nvSpPr>
-          <p:cNvPr id="2" name="Slide Image Placeholder 1">
-            <a:extLst>
-              <a:ext uri="{FF2B5EF4-FFF2-40B4-BE49-F238E27FC236}">
-                <a16:creationId xmlns:a16="http://schemas.microsoft.com/office/drawing/2014/main" id="{E893E3A4-B1A7-2C29-A3BB-1AC7E6D387C9}"/>
-              </a:ext>
-            </a:extLst>
-          </p:cNvPr>
-          <p:cNvSpPr>
-            <a:spLocks noGrp="1" noRot="1" noChangeAspect="1"/>
-          </p:cNvSpPr>
-          <p:nvPr>
-            <p:ph type="sldImg"/>
-          </p:nvPr>
-        </p:nvSpPr>
-        <p:spPr/>
-        <p:txBody>
-          <a:bodyPr/>
-          <a:lstStyle/>
-          <a:p>
-            <a:endParaRPr lang="zh-TW" altLang="en-US"/>
-          </a:p>
-        </p:txBody>
-      </p:sp>
-      <p:sp>
-        <p:nvSpPr>
-          <p:cNvPr id="3" name="Notes Placeholder 2">
-            <a:extLst>
-              <a:ext uri="{FF2B5EF4-FFF2-40B4-BE49-F238E27FC236}">
-                <a16:creationId xmlns:a16="http://schemas.microsoft.com/office/drawing/2014/main" id="{160C6BEB-B163-351B-D7A5-C9DE472754D5}"/>
-              </a:ext>
-            </a:extLst>
-          </p:cNvPr>
-          <p:cNvSpPr>
-            <a:spLocks noGrp="1"/>
-          </p:cNvSpPr>
-          <p:nvPr>
-            <p:ph type="body" idx="1"/>
-          </p:nvPr>
-        </p:nvSpPr>
-        <p:spPr/>
-        <p:txBody>
-          <a:bodyPr/>
-          <a:lstStyle/>
-          <a:p>
-            <a:endParaRPr/>
-          </a:p>
-        </p:txBody>
-      </p:sp>
-      <p:sp>
-        <p:nvSpPr>
-          <p:cNvPr id="4" name="Slide Number Placeholder 3">
-            <a:extLst>
-              <a:ext uri="{FF2B5EF4-FFF2-40B4-BE49-F238E27FC236}">
-                <a16:creationId xmlns:a16="http://schemas.microsoft.com/office/drawing/2014/main" id="{6292EBE5-E60A-E884-12FE-D8E2CA7D7928}"/>
-              </a:ext>
-            </a:extLst>
-          </p:cNvPr>
-          <p:cNvSpPr>
-            <a:spLocks noGrp="1"/>
-          </p:cNvSpPr>
-          <p:nvPr>
-            <p:ph type="sldNum" idx="5"/>
-          </p:nvPr>
-        </p:nvSpPr>
-        <p:spPr/>
-        <p:txBody>
-          <a:bodyPr/>
-          <a:lstStyle/>
-          <a:p>
-            <a:endParaRPr/>
-          </a:p>
-        </p:txBody>
-      </p:sp>
-    </p:spTree>
-    <p:extLst>
-      <p:ext uri="{BB962C8B-B14F-4D97-AF65-F5344CB8AC3E}">
-        <p14:creationId xmlns:p14="http://schemas.microsoft.com/office/powerpoint/2010/main" val="267916886"/>
-      </p:ext>
-    </p:extLst>
-  </p:cSld>
-  <p:clrMapOvr>
-    <a:masterClrMapping/>
-  </p:clrMapOvr>
-</p:notes>
-</file>
-
-<file path=ppt/notesSlides/notesSlide17.xml><?xml version="1.0" encoding="utf-8"?>
-<p:notes xmlns:a="http://schemas.openxmlformats.org/drawingml/2006/main" xmlns:r="http://schemas.openxmlformats.org/officeDocument/2006/relationships" xmlns:p="http://schemas.openxmlformats.org/presentationml/2006/main">
-  <p:cSld>
-    <p:spTree>
-      <p:nvGrpSpPr>
-        <p:cNvPr id="1" name=""/>
-        <p:cNvGrpSpPr/>
-        <p:nvPr/>
-      </p:nvGrpSpPr>
-      <p:grpSpPr>
-        <a:xfrm>
-          <a:off x="0" y="0"/>
-          <a:ext cx="0" cy="0"/>
-          <a:chOff x="0" y="0"/>
-          <a:chExt cx="0" cy="0"/>
-        </a:xfrm>
-      </p:grpSpPr>
-      <p:sp>
-        <p:nvSpPr>
-          <p:cNvPr id="2" name="Slide Image Placeholder 1"/>
-          <p:cNvSpPr>
-            <a:spLocks noGrp="1" noRot="1" noChangeAspect="1"/>
-          </p:cNvSpPr>
-          <p:nvPr>
-            <p:ph type="sldImg"/>
-          </p:nvPr>
-        </p:nvSpPr>
-        <p:spPr/>
-        <p:txBody>
-          <a:bodyPr/>
-          <a:lstStyle/>
-          <a:p>
-            <a:endParaRPr lang="zh-TW" altLang="en-US"/>
-          </a:p>
-        </p:txBody>
-      </p:sp>
-      <p:sp>
-        <p:nvSpPr>
-          <p:cNvPr id="3" name="Notes Placeholder 2"/>
-          <p:cNvSpPr>
-            <a:spLocks noGrp="1"/>
-          </p:cNvSpPr>
-          <p:nvPr>
-            <p:ph type="body" idx="1"/>
-          </p:nvPr>
-        </p:nvSpPr>
-        <p:spPr/>
-        <p:txBody>
-          <a:bodyPr/>
-          <a:lstStyle/>
-          <a:p>
-            <a:endParaRPr/>
-          </a:p>
-        </p:txBody>
-      </p:sp>
-      <p:sp>
-        <p:nvSpPr>
-          <p:cNvPr id="4" name="Slide Number Placeholder 3"/>
-          <p:cNvSpPr>
-            <a:spLocks noGrp="1"/>
-          </p:cNvSpPr>
-          <p:nvPr>
-            <p:ph type="sldNum" idx="5"/>
-          </p:nvPr>
-        </p:nvSpPr>
-        <p:spPr/>
-        <p:txBody>
-          <a:bodyPr/>
-          <a:lstStyle/>
-          <a:p>
-            <a:endParaRPr/>
-          </a:p>
-        </p:txBody>
-      </p:sp>
-    </p:spTree>
-    <p:extLst>
-      <p:ext uri="{BB962C8B-B14F-4D97-AF65-F5344CB8AC3E}">
-        <p14:creationId xmlns:p14="http://schemas.microsoft.com/office/powerpoint/2010/main" val="3088753758"/>
-      </p:ext>
-    </p:extLst>
-  </p:cSld>
-  <p:clrMapOvr>
-    <a:masterClrMapping/>
-  </p:clrMapOvr>
-</p:notes>
-</file>
-
-<file path=ppt/notesSlides/notesSlide18.xml><?xml version="1.0" encoding="utf-8"?>
-<p:notes xmlns:a="http://schemas.openxmlformats.org/drawingml/2006/main" xmlns:r="http://schemas.openxmlformats.org/officeDocument/2006/relationships" xmlns:p="http://schemas.openxmlformats.org/presentationml/2006/main">
-  <p:cSld>
-    <p:spTree>
-      <p:nvGrpSpPr>
-        <p:cNvPr id="1" name=""/>
-        <p:cNvGrpSpPr/>
-        <p:nvPr/>
-      </p:nvGrpSpPr>
-      <p:grpSpPr>
-        <a:xfrm>
-          <a:off x="0" y="0"/>
-          <a:ext cx="0" cy="0"/>
-          <a:chOff x="0" y="0"/>
-          <a:chExt cx="0" cy="0"/>
-        </a:xfrm>
-      </p:grpSpPr>
-      <p:sp>
-        <p:nvSpPr>
-          <p:cNvPr id="2" name="Slide Image Placeholder 1"/>
-          <p:cNvSpPr>
-            <a:spLocks noGrp="1" noRot="1" noChangeAspect="1"/>
-          </p:cNvSpPr>
-          <p:nvPr>
-            <p:ph type="sldImg"/>
-          </p:nvPr>
-        </p:nvSpPr>
-        <p:spPr/>
-        <p:txBody>
-          <a:bodyPr/>
-          <a:lstStyle/>
-          <a:p>
-            <a:endParaRPr lang="zh-TW" altLang="en-US"/>
-          </a:p>
-        </p:txBody>
-      </p:sp>
-      <p:sp>
-        <p:nvSpPr>
-          <p:cNvPr id="3" name="Notes Placeholder 2"/>
-          <p:cNvSpPr>
-            <a:spLocks noGrp="1"/>
-          </p:cNvSpPr>
-          <p:nvPr>
-            <p:ph type="body" idx="1"/>
-          </p:nvPr>
-        </p:nvSpPr>
-        <p:spPr/>
-        <p:txBody>
-          <a:bodyPr/>
-          <a:lstStyle/>
-          <a:p>
-            <a:r>
-              <a:rPr lang="en-US" dirty="0"/>
-              <a:t>https://www.sciencedirect.com/topics/engineering/phasor-representation</a:t>
-            </a:r>
-            <a:r>
-              <a:rPr lang="zh-TW" altLang="en-US" dirty="0"/>
-              <a:t> </a:t>
-            </a:r>
-            <a:endParaRPr lang="en-US" altLang="zh-TW" dirty="0"/>
-          </a:p>
-          <a:p>
-            <a:endParaRPr lang="en-US" dirty="0"/>
-          </a:p>
-          <a:p>
-            <a:r>
-              <a:rPr lang="en-US" altLang="zh-TW" dirty="0"/>
-              <a:t>CSI=transmitted reference signal / received signal​</a:t>
-            </a:r>
-            <a:endParaRPr dirty="0"/>
-          </a:p>
-        </p:txBody>
-      </p:sp>
-      <p:sp>
-        <p:nvSpPr>
-          <p:cNvPr id="4" name="Slide Number Placeholder 3"/>
-          <p:cNvSpPr>
-            <a:spLocks noGrp="1"/>
-          </p:cNvSpPr>
-          <p:nvPr>
-            <p:ph type="sldNum" idx="5"/>
-          </p:nvPr>
-        </p:nvSpPr>
-        <p:spPr/>
-        <p:txBody>
-          <a:bodyPr/>
-          <a:lstStyle/>
-          <a:p>
-            <a:endParaRPr/>
-          </a:p>
-        </p:txBody>
-      </p:sp>
-    </p:spTree>
-    <p:extLst>
-      <p:ext uri="{BB962C8B-B14F-4D97-AF65-F5344CB8AC3E}">
-        <p14:creationId xmlns:p14="http://schemas.microsoft.com/office/powerpoint/2010/main" val="269360236"/>
-      </p:ext>
-    </p:extLst>
-  </p:cSld>
-  <p:clrMapOvr>
-    <a:masterClrMapping/>
-  </p:clrMapOvr>
-</p:notes>
-</file>
-
-<file path=ppt/notesSlides/notesSlide19.xml><?xml version="1.0" encoding="utf-8"?>
-<p:notes xmlns:a="http://schemas.openxmlformats.org/drawingml/2006/main" xmlns:r="http://schemas.openxmlformats.org/officeDocument/2006/relationships" xmlns:p="http://schemas.openxmlformats.org/presentationml/2006/main">
-  <p:cSld>
-    <p:spTree>
-      <p:nvGrpSpPr>
-        <p:cNvPr id="1" name=""/>
-        <p:cNvGrpSpPr/>
-        <p:nvPr/>
-      </p:nvGrpSpPr>
-      <p:grpSpPr>
-        <a:xfrm>
-          <a:off x="0" y="0"/>
-          <a:ext cx="0" cy="0"/>
-          <a:chOff x="0" y="0"/>
-          <a:chExt cx="0" cy="0"/>
-        </a:xfrm>
-      </p:grpSpPr>
-      <p:sp>
-        <p:nvSpPr>
-          <p:cNvPr id="2" name="Slide Image Placeholder 1"/>
-          <p:cNvSpPr>
-            <a:spLocks noGrp="1" noRot="1" noChangeAspect="1"/>
-          </p:cNvSpPr>
-          <p:nvPr>
-            <p:ph type="sldImg"/>
-          </p:nvPr>
-        </p:nvSpPr>
-        <p:spPr/>
-        <p:txBody>
-          <a:bodyPr/>
-          <a:lstStyle/>
-          <a:p>
-            <a:endParaRPr lang="zh-TW" altLang="en-US"/>
-          </a:p>
-        </p:txBody>
-      </p:sp>
-      <p:sp>
-        <p:nvSpPr>
-          <p:cNvPr id="3" name="Notes Placeholder 2"/>
-          <p:cNvSpPr>
-            <a:spLocks noGrp="1"/>
-          </p:cNvSpPr>
-          <p:nvPr>
-            <p:ph type="body" idx="1"/>
-          </p:nvPr>
-        </p:nvSpPr>
-        <p:spPr/>
-        <p:txBody>
-          <a:bodyPr/>
-          <a:lstStyle/>
-          <a:p>
-            <a:r>
-              <a:rPr lang="en-US" dirty="0"/>
-              <a:t>https://www.sciencedirect.com/science/article/pii/S209099771300031X</a:t>
-            </a:r>
-            <a:endParaRPr dirty="0"/>
-          </a:p>
-        </p:txBody>
-      </p:sp>
-      <p:sp>
-        <p:nvSpPr>
-          <p:cNvPr id="4" name="Slide Number Placeholder 3"/>
-          <p:cNvSpPr>
-            <a:spLocks noGrp="1"/>
-          </p:cNvSpPr>
-          <p:nvPr>
-            <p:ph type="sldNum" idx="5"/>
-          </p:nvPr>
-        </p:nvSpPr>
-        <p:spPr/>
-        <p:txBody>
-          <a:bodyPr/>
-          <a:lstStyle/>
-          <a:p>
-            <a:endParaRPr/>
-          </a:p>
-        </p:txBody>
-      </p:sp>
-    </p:spTree>
-    <p:extLst>
-      <p:ext uri="{BB962C8B-B14F-4D97-AF65-F5344CB8AC3E}">
-        <p14:creationId xmlns:p14="http://schemas.microsoft.com/office/powerpoint/2010/main" val="1378868269"/>
-      </p:ext>
-    </p:extLst>
-  </p:cSld>
-  <p:clrMapOvr>
-    <a:masterClrMapping/>
-  </p:clrMapOvr>
-</p:notes>
-</file>
-
-<file path=ppt/notesSlides/notesSlide2.xml><?xml version="1.0" encoding="utf-8"?>
-<p:notes xmlns:a="http://schemas.openxmlformats.org/drawingml/2006/main" xmlns:r="http://schemas.openxmlformats.org/officeDocument/2006/relationships" xmlns:p="http://schemas.openxmlformats.org/presentationml/2006/main">
-  <p:cSld>
-    <p:spTree>
-      <p:nvGrpSpPr>
-        <p:cNvPr id="1" name=""/>
-        <p:cNvGrpSpPr/>
-        <p:nvPr/>
-      </p:nvGrpSpPr>
-      <p:grpSpPr>
-        <a:xfrm>
-          <a:off x="0" y="0"/>
-          <a:ext cx="0" cy="0"/>
-          <a:chOff x="0" y="0"/>
-          <a:chExt cx="0" cy="0"/>
-        </a:xfrm>
-      </p:grpSpPr>
-      <p:sp>
-        <p:nvSpPr>
-          <p:cNvPr id="2" name="Slide Image Placeholder 1"/>
-          <p:cNvSpPr>
-            <a:spLocks noGrp="1" noRot="1" noChangeAspect="1"/>
-          </p:cNvSpPr>
-          <p:nvPr>
-            <p:ph type="sldImg"/>
-          </p:nvPr>
-        </p:nvSpPr>
-        <p:spPr/>
-        <p:txBody>
-          <a:bodyPr/>
-          <a:lstStyle/>
-          <a:p>
-            <a:endParaRPr lang="zh-TW" altLang="en-US"/>
-          </a:p>
-        </p:txBody>
-      </p:sp>
-      <p:sp>
-        <p:nvSpPr>
-          <p:cNvPr id="3" name="Notes Placeholder 2"/>
-          <p:cNvSpPr>
-            <a:spLocks noGrp="1"/>
-          </p:cNvSpPr>
-          <p:nvPr>
-            <p:ph type="body" idx="1"/>
-          </p:nvPr>
-        </p:nvSpPr>
-        <p:spPr/>
-        <p:txBody>
-          <a:bodyPr/>
-          <a:lstStyle/>
-          <a:p>
-            <a:endParaRPr/>
-          </a:p>
-        </p:txBody>
-      </p:sp>
-      <p:sp>
-        <p:nvSpPr>
-          <p:cNvPr id="4" name="Slide Number Placeholder 3"/>
-          <p:cNvSpPr>
-            <a:spLocks noGrp="1"/>
-          </p:cNvSpPr>
-          <p:nvPr>
-            <p:ph type="sldNum" idx="5"/>
-          </p:nvPr>
-        </p:nvSpPr>
-        <p:spPr/>
-        <p:txBody>
-          <a:bodyPr/>
-          <a:lstStyle/>
-          <a:p>
-            <a:endParaRPr/>
-          </a:p>
-        </p:txBody>
-      </p:sp>
-    </p:spTree>
-  </p:cSld>
-  <p:clrMapOvr>
-    <a:masterClrMapping/>
-  </p:clrMapOvr>
-</p:notes>
-</file>
-
-<file path=ppt/notesSlides/notesSlide20.xml><?xml version="1.0" encoding="utf-8"?>
-<p:notes xmlns:a="http://schemas.openxmlformats.org/drawingml/2006/main" xmlns:r="http://schemas.openxmlformats.org/officeDocument/2006/relationships" xmlns:p="http://schemas.openxmlformats.org/presentationml/2006/main">
-  <p:cSld>
-    <p:spTree>
-      <p:nvGrpSpPr>
-        <p:cNvPr id="1" name=""/>
-        <p:cNvGrpSpPr/>
-        <p:nvPr/>
-      </p:nvGrpSpPr>
-      <p:grpSpPr>
-        <a:xfrm>
-          <a:off x="0" y="0"/>
-          <a:ext cx="0" cy="0"/>
-          <a:chOff x="0" y="0"/>
-          <a:chExt cx="0" cy="0"/>
-        </a:xfrm>
-      </p:grpSpPr>
-      <p:sp>
-        <p:nvSpPr>
-          <p:cNvPr id="2" name="Slide Image Placeholder 1"/>
-          <p:cNvSpPr>
-            <a:spLocks noGrp="1" noRot="1" noChangeAspect="1"/>
-          </p:cNvSpPr>
-          <p:nvPr>
-            <p:ph type="sldImg"/>
-          </p:nvPr>
-        </p:nvSpPr>
-        <p:spPr/>
-        <p:txBody>
-          <a:bodyPr/>
-          <a:lstStyle/>
-          <a:p>
-            <a:endParaRPr lang="zh-TW" altLang="en-US"/>
-          </a:p>
-        </p:txBody>
-      </p:sp>
-      <p:sp>
-        <p:nvSpPr>
-          <p:cNvPr id="3" name="Notes Placeholder 2"/>
-          <p:cNvSpPr>
-            <a:spLocks noGrp="1"/>
-          </p:cNvSpPr>
-          <p:nvPr>
-            <p:ph type="body" idx="1"/>
-          </p:nvPr>
-        </p:nvSpPr>
-        <p:spPr/>
-        <p:txBody>
-          <a:bodyPr/>
-          <a:lstStyle/>
-          <a:p>
-            <a:endParaRPr/>
-          </a:p>
-        </p:txBody>
-      </p:sp>
-      <p:sp>
-        <p:nvSpPr>
-          <p:cNvPr id="4" name="Slide Number Placeholder 3"/>
-          <p:cNvSpPr>
-            <a:spLocks noGrp="1"/>
-          </p:cNvSpPr>
-          <p:nvPr>
-            <p:ph type="sldNum" idx="5"/>
-          </p:nvPr>
-        </p:nvSpPr>
-        <p:spPr/>
-        <p:txBody>
-          <a:bodyPr/>
-          <a:lstStyle/>
-          <a:p>
-            <a:endParaRPr/>
-          </a:p>
-        </p:txBody>
-      </p:sp>
-    </p:spTree>
-  </p:cSld>
-  <p:clrMapOvr>
-    <a:masterClrMapping/>
-  </p:clrMapOvr>
-</p:notes>
-</file>
-
-<file path=ppt/notesSlides/notesSlide21.xml><?xml version="1.0" encoding="utf-8"?>
-<p:notes xmlns:a="http://schemas.openxmlformats.org/drawingml/2006/main" xmlns:r="http://schemas.openxmlformats.org/officeDocument/2006/relationships" xmlns:p="http://schemas.openxmlformats.org/presentationml/2006/main">
-  <p:cSld>
-    <p:spTree>
-      <p:nvGrpSpPr>
-        <p:cNvPr id="1" name=""/>
-        <p:cNvGrpSpPr/>
-        <p:nvPr/>
-      </p:nvGrpSpPr>
-      <p:grpSpPr>
-        <a:xfrm>
-          <a:off x="0" y="0"/>
-          <a:ext cx="0" cy="0"/>
-          <a:chOff x="0" y="0"/>
-          <a:chExt cx="0" cy="0"/>
-        </a:xfrm>
-      </p:grpSpPr>
-      <p:sp>
-        <p:nvSpPr>
-          <p:cNvPr id="2" name="Slide Image Placeholder 1"/>
-          <p:cNvSpPr>
-            <a:spLocks noGrp="1" noRot="1" noChangeAspect="1"/>
-          </p:cNvSpPr>
-          <p:nvPr>
-            <p:ph type="sldImg"/>
-          </p:nvPr>
-        </p:nvSpPr>
-        <p:spPr/>
-        <p:txBody>
-          <a:bodyPr/>
-          <a:lstStyle/>
-          <a:p>
-            <a:endParaRPr lang="zh-TW" altLang="en-US"/>
-          </a:p>
-        </p:txBody>
-      </p:sp>
-      <p:sp>
-        <p:nvSpPr>
-          <p:cNvPr id="3" name="Notes Placeholder 2"/>
-          <p:cNvSpPr>
-            <a:spLocks noGrp="1"/>
-          </p:cNvSpPr>
-          <p:nvPr>
-            <p:ph type="body" idx="1"/>
-          </p:nvPr>
-        </p:nvSpPr>
-        <p:spPr/>
-        <p:txBody>
-          <a:bodyPr/>
-          <a:lstStyle/>
-          <a:p>
-            <a:endParaRPr/>
-          </a:p>
-        </p:txBody>
-      </p:sp>
-      <p:sp>
-        <p:nvSpPr>
-          <p:cNvPr id="4" name="Slide Number Placeholder 3"/>
-          <p:cNvSpPr>
-            <a:spLocks noGrp="1"/>
-          </p:cNvSpPr>
-          <p:nvPr>
-            <p:ph type="sldNum" idx="5"/>
-          </p:nvPr>
-        </p:nvSpPr>
-        <p:spPr/>
-        <p:txBody>
-          <a:bodyPr/>
-          <a:lstStyle/>
-          <a:p>
-            <a:endParaRPr/>
-          </a:p>
-        </p:txBody>
-      </p:sp>
-    </p:spTree>
-  </p:cSld>
-  <p:clrMapOvr>
-    <a:masterClrMapping/>
-  </p:clrMapOvr>
-</p:notes>
-</file>
-
-<file path=ppt/notesSlides/notesSlide3.xml><?xml version="1.0" encoding="utf-8"?>
-<p:notes xmlns:a="http://schemas.openxmlformats.org/drawingml/2006/main" xmlns:r="http://schemas.openxmlformats.org/officeDocument/2006/relationships" xmlns:p="http://schemas.openxmlformats.org/presentationml/2006/main">
-  <p:cSld>
-    <p:spTree>
-      <p:nvGrpSpPr>
-        <p:cNvPr id="1" name=""/>
-        <p:cNvGrpSpPr/>
-        <p:nvPr/>
-      </p:nvGrpSpPr>
-      <p:grpSpPr>
-        <a:xfrm>
-          <a:off x="0" y="0"/>
-          <a:ext cx="0" cy="0"/>
-          <a:chOff x="0" y="0"/>
-          <a:chExt cx="0" cy="0"/>
-        </a:xfrm>
-      </p:grpSpPr>
-      <p:sp>
-        <p:nvSpPr>
-          <p:cNvPr id="2" name="Slide Image Placeholder 1"/>
-          <p:cNvSpPr>
-            <a:spLocks noGrp="1" noRot="1" noChangeAspect="1"/>
-          </p:cNvSpPr>
-          <p:nvPr>
-            <p:ph type="sldImg"/>
-          </p:nvPr>
-        </p:nvSpPr>
-        <p:spPr/>
-        <p:txBody>
-          <a:bodyPr/>
-          <a:lstStyle/>
-          <a:p>
-            <a:endParaRPr lang="zh-TW" altLang="en-US"/>
-          </a:p>
-        </p:txBody>
-      </p:sp>
-      <p:sp>
-        <p:nvSpPr>
-          <p:cNvPr id="3" name="Notes Placeholder 2"/>
-          <p:cNvSpPr>
-            <a:spLocks noGrp="1"/>
-          </p:cNvSpPr>
-          <p:nvPr>
-            <p:ph type="body" idx="1"/>
-          </p:nvPr>
-        </p:nvSpPr>
-        <p:spPr/>
-        <p:txBody>
-          <a:bodyPr/>
-          <a:lstStyle/>
-          <a:p>
-            <a:endParaRPr/>
-          </a:p>
-        </p:txBody>
-      </p:sp>
-      <p:sp>
-        <p:nvSpPr>
-          <p:cNvPr id="4" name="Slide Number Placeholder 3"/>
-          <p:cNvSpPr>
-            <a:spLocks noGrp="1"/>
-          </p:cNvSpPr>
-          <p:nvPr>
-            <p:ph type="sldNum" idx="5"/>
-          </p:nvPr>
-        </p:nvSpPr>
-        <p:spPr/>
-        <p:txBody>
-          <a:bodyPr/>
-          <a:lstStyle/>
-          <a:p>
-            <a:endParaRPr/>
-          </a:p>
-        </p:txBody>
-      </p:sp>
-    </p:spTree>
-  </p:cSld>
-  <p:clrMapOvr>
-    <a:masterClrMapping/>
-  </p:clrMapOvr>
-</p:notes>
-</file>
-
-<file path=ppt/notesSlides/notesSlide4.xml><?xml version="1.0" encoding="utf-8"?>
-<p:notes xmlns:a="http://schemas.openxmlformats.org/drawingml/2006/main" xmlns:r="http://schemas.openxmlformats.org/officeDocument/2006/relationships" xmlns:p="http://schemas.openxmlformats.org/presentationml/2006/main">
-  <p:cSld>
-    <p:spTree>
-      <p:nvGrpSpPr>
-        <p:cNvPr id="1" name=""/>
-        <p:cNvGrpSpPr/>
-        <p:nvPr/>
-      </p:nvGrpSpPr>
-      <p:grpSpPr>
-        <a:xfrm>
-          <a:off x="0" y="0"/>
-          <a:ext cx="0" cy="0"/>
-          <a:chOff x="0" y="0"/>
-          <a:chExt cx="0" cy="0"/>
-        </a:xfrm>
-      </p:grpSpPr>
-      <p:sp>
-        <p:nvSpPr>
-          <p:cNvPr id="2" name="Slide Image Placeholder 1"/>
-          <p:cNvSpPr>
-            <a:spLocks noGrp="1" noRot="1" noChangeAspect="1"/>
-          </p:cNvSpPr>
-          <p:nvPr>
-            <p:ph type="sldImg"/>
-          </p:nvPr>
-        </p:nvSpPr>
-        <p:spPr/>
-        <p:txBody>
-          <a:bodyPr/>
-          <a:lstStyle/>
-          <a:p>
-            <a:endParaRPr lang="zh-TW" altLang="en-US"/>
-          </a:p>
-        </p:txBody>
-      </p:sp>
-      <p:sp>
-        <p:nvSpPr>
-          <p:cNvPr id="3" name="Notes Placeholder 2"/>
-          <p:cNvSpPr>
-            <a:spLocks noGrp="1"/>
-          </p:cNvSpPr>
-          <p:nvPr>
-            <p:ph type="body" idx="1"/>
-          </p:nvPr>
-        </p:nvSpPr>
-        <p:spPr/>
-        <p:txBody>
-          <a:bodyPr/>
-          <a:lstStyle/>
-          <a:p>
-            <a:endParaRPr/>
-          </a:p>
-        </p:txBody>
-      </p:sp>
-      <p:sp>
-        <p:nvSpPr>
-          <p:cNvPr id="4" name="Slide Number Placeholder 3"/>
-          <p:cNvSpPr>
-            <a:spLocks noGrp="1"/>
-          </p:cNvSpPr>
-          <p:nvPr>
-            <p:ph type="sldNum" idx="5"/>
-          </p:nvPr>
-        </p:nvSpPr>
-        <p:spPr/>
-        <p:txBody>
-          <a:bodyPr/>
-          <a:lstStyle/>
-          <a:p>
-            <a:endParaRPr/>
-          </a:p>
-        </p:txBody>
-      </p:sp>
-    </p:spTree>
-  </p:cSld>
-  <p:clrMapOvr>
-    <a:masterClrMapping/>
-  </p:clrMapOvr>
-</p:notes>
-</file>
-
-<file path=ppt/notesSlides/notesSlide5.xml><?xml version="1.0" encoding="utf-8"?>
-<p:notes xmlns:a="http://schemas.openxmlformats.org/drawingml/2006/main" xmlns:r="http://schemas.openxmlformats.org/officeDocument/2006/relationships" xmlns:p="http://schemas.openxmlformats.org/presentationml/2006/main">
-  <p:cSld>
-    <p:spTree>
-      <p:nvGrpSpPr>
-        <p:cNvPr id="1" name=""/>
-        <p:cNvGrpSpPr/>
-        <p:nvPr/>
-      </p:nvGrpSpPr>
-      <p:grpSpPr>
-        <a:xfrm>
-          <a:off x="0" y="0"/>
-          <a:ext cx="0" cy="0"/>
-          <a:chOff x="0" y="0"/>
-          <a:chExt cx="0" cy="0"/>
-        </a:xfrm>
-      </p:grpSpPr>
-      <p:sp>
-        <p:nvSpPr>
-          <p:cNvPr id="2" name="Slide Image Placeholder 1"/>
-          <p:cNvSpPr>
-            <a:spLocks noGrp="1" noRot="1" noChangeAspect="1"/>
-          </p:cNvSpPr>
-          <p:nvPr>
-            <p:ph type="sldImg"/>
-          </p:nvPr>
-        </p:nvSpPr>
-        <p:spPr/>
-        <p:txBody>
-          <a:bodyPr/>
-          <a:lstStyle/>
-          <a:p>
-            <a:endParaRPr lang="zh-TW" altLang="en-US"/>
-          </a:p>
-        </p:txBody>
-      </p:sp>
-      <p:sp>
-        <p:nvSpPr>
-          <p:cNvPr id="3" name="Notes Placeholder 2"/>
-          <p:cNvSpPr>
-            <a:spLocks noGrp="1"/>
-          </p:cNvSpPr>
-          <p:nvPr>
-            <p:ph type="body" idx="1"/>
-          </p:nvPr>
-        </p:nvSpPr>
-        <p:spPr/>
-        <p:txBody>
-          <a:bodyPr/>
-          <a:lstStyle/>
-          <a:p>
-            <a:r>
-              <a:t>只能控制 AP side的RTS threshold是問題嗎?</a:t>
-            </a:r>
-          </a:p>
-        </p:txBody>
-      </p:sp>
-      <p:sp>
-        <p:nvSpPr>
-          <p:cNvPr id="4" name="Slide Number Placeholder 3"/>
-          <p:cNvSpPr>
-            <a:spLocks noGrp="1"/>
-          </p:cNvSpPr>
-          <p:nvPr>
-            <p:ph type="sldNum" idx="5"/>
-          </p:nvPr>
-        </p:nvSpPr>
-        <p:spPr/>
-        <p:txBody>
-          <a:bodyPr/>
-          <a:lstStyle/>
-          <a:p>
-            <a:endParaRPr/>
-          </a:p>
-        </p:txBody>
-      </p:sp>
-    </p:spTree>
-  </p:cSld>
-  <p:clrMapOvr>
-    <a:masterClrMapping/>
-  </p:clrMapOvr>
-</p:notes>
-</file>
-
-<file path=ppt/notesSlides/notesSlide6.xml><?xml version="1.0" encoding="utf-8"?>
-<p:notes xmlns:a="http://schemas.openxmlformats.org/drawingml/2006/main" xmlns:r="http://schemas.openxmlformats.org/officeDocument/2006/relationships" xmlns:p="http://schemas.openxmlformats.org/presentationml/2006/main">
-  <p:cSld>
-    <p:spTree>
-      <p:nvGrpSpPr>
-        <p:cNvPr id="1" name=""/>
-        <p:cNvGrpSpPr/>
-        <p:nvPr/>
-      </p:nvGrpSpPr>
-      <p:grpSpPr>
-        <a:xfrm>
-          <a:off x="0" y="0"/>
-          <a:ext cx="0" cy="0"/>
-          <a:chOff x="0" y="0"/>
-          <a:chExt cx="0" cy="0"/>
-        </a:xfrm>
-      </p:grpSpPr>
-      <p:sp>
-        <p:nvSpPr>
-          <p:cNvPr id="2" name="Slide Image Placeholder 1"/>
-          <p:cNvSpPr>
-            <a:spLocks noGrp="1" noRot="1" noChangeAspect="1"/>
-          </p:cNvSpPr>
-          <p:nvPr>
-            <p:ph type="sldImg"/>
-          </p:nvPr>
-        </p:nvSpPr>
-        <p:spPr/>
-        <p:txBody>
-          <a:bodyPr/>
-          <a:lstStyle/>
-          <a:p>
-            <a:endParaRPr lang="zh-TW" altLang="en-US"/>
-          </a:p>
-        </p:txBody>
-      </p:sp>
-      <p:sp>
-        <p:nvSpPr>
-          <p:cNvPr id="3" name="Notes Placeholder 2"/>
-          <p:cNvSpPr>
-            <a:spLocks noGrp="1"/>
-          </p:cNvSpPr>
-          <p:nvPr>
-            <p:ph type="body" idx="1"/>
-          </p:nvPr>
-        </p:nvSpPr>
-        <p:spPr/>
-        <p:txBody>
-          <a:bodyPr/>
-          <a:lstStyle/>
-          <a:p>
-            <a:endParaRPr/>
-          </a:p>
-        </p:txBody>
-      </p:sp>
-      <p:sp>
-        <p:nvSpPr>
-          <p:cNvPr id="4" name="Slide Number Placeholder 3"/>
-          <p:cNvSpPr>
-            <a:spLocks noGrp="1"/>
-          </p:cNvSpPr>
-          <p:nvPr>
-            <p:ph type="sldNum" idx="5"/>
-          </p:nvPr>
-        </p:nvSpPr>
-        <p:spPr/>
-        <p:txBody>
-          <a:bodyPr/>
-          <a:lstStyle/>
-          <a:p>
-            <a:endParaRPr/>
-          </a:p>
-        </p:txBody>
-      </p:sp>
-    </p:spTree>
-  </p:cSld>
-  <p:clrMapOvr>
-    <a:masterClrMapping/>
-  </p:clrMapOvr>
-</p:notes>
-</file>
-
-<file path=ppt/notesSlides/notesSlide7.xml><?xml version="1.0" encoding="utf-8"?>
-<p:notes xmlns:a="http://schemas.openxmlformats.org/drawingml/2006/main" xmlns:r="http://schemas.openxmlformats.org/officeDocument/2006/relationships" xmlns:p="http://schemas.openxmlformats.org/presentationml/2006/main">
-  <p:cSld>
-    <p:spTree>
-      <p:nvGrpSpPr>
-        <p:cNvPr id="1" name="">
-          <a:extLst>
-            <a:ext uri="{FF2B5EF4-FFF2-40B4-BE49-F238E27FC236}">
-              <a16:creationId xmlns:a16="http://schemas.microsoft.com/office/drawing/2014/main" id="{BCE7CF6E-5A4E-6AF1-66DF-5993D896FBBD}"/>
-            </a:ext>
-          </a:extLst>
-        </p:cNvPr>
-        <p:cNvGrpSpPr/>
-        <p:nvPr/>
-      </p:nvGrpSpPr>
-      <p:grpSpPr>
-        <a:xfrm>
-          <a:off x="0" y="0"/>
-          <a:ext cx="0" cy="0"/>
-          <a:chOff x="0" y="0"/>
-          <a:chExt cx="0" cy="0"/>
-        </a:xfrm>
-      </p:grpSpPr>
-      <p:sp>
-        <p:nvSpPr>
-          <p:cNvPr id="2" name="Slide Image Placeholder 1">
-            <a:extLst>
-              <a:ext uri="{FF2B5EF4-FFF2-40B4-BE49-F238E27FC236}">
-                <a16:creationId xmlns:a16="http://schemas.microsoft.com/office/drawing/2014/main" id="{264772C8-66E1-A5C9-9D59-998412A923BD}"/>
-              </a:ext>
-            </a:extLst>
-          </p:cNvPr>
-          <p:cNvSpPr>
-            <a:spLocks noGrp="1" noRot="1" noChangeAspect="1"/>
-          </p:cNvSpPr>
-          <p:nvPr>
-            <p:ph type="sldImg"/>
-          </p:nvPr>
-        </p:nvSpPr>
-        <p:spPr/>
-        <p:txBody>
-          <a:bodyPr/>
-          <a:lstStyle/>
-          <a:p>
-            <a:endParaRPr lang="zh-TW" altLang="en-US"/>
-          </a:p>
-        </p:txBody>
-      </p:sp>
-      <p:sp>
-        <p:nvSpPr>
-          <p:cNvPr id="3" name="Notes Placeholder 2">
-            <a:extLst>
-              <a:ext uri="{FF2B5EF4-FFF2-40B4-BE49-F238E27FC236}">
-                <a16:creationId xmlns:a16="http://schemas.microsoft.com/office/drawing/2014/main" id="{230B2AB3-43E7-54D6-9A95-9E3E5F21B8A8}"/>
-              </a:ext>
-            </a:extLst>
-          </p:cNvPr>
-          <p:cNvSpPr>
-            <a:spLocks noGrp="1"/>
-          </p:cNvSpPr>
-          <p:nvPr>
-            <p:ph type="body" idx="1"/>
-          </p:nvPr>
-        </p:nvSpPr>
-        <p:spPr/>
-        <p:txBody>
-          <a:bodyPr/>
-          <a:lstStyle/>
-          <a:p>
-            <a:endParaRPr/>
-          </a:p>
-        </p:txBody>
-      </p:sp>
-      <p:sp>
-        <p:nvSpPr>
-          <p:cNvPr id="4" name="Slide Number Placeholder 3">
-            <a:extLst>
-              <a:ext uri="{FF2B5EF4-FFF2-40B4-BE49-F238E27FC236}">
-                <a16:creationId xmlns:a16="http://schemas.microsoft.com/office/drawing/2014/main" id="{EE04830D-E81E-086A-B2DA-F0D3D9CD97D0}"/>
-              </a:ext>
-            </a:extLst>
-          </p:cNvPr>
-          <p:cNvSpPr>
-            <a:spLocks noGrp="1"/>
-          </p:cNvSpPr>
-          <p:nvPr>
-            <p:ph type="sldNum" idx="5"/>
-          </p:nvPr>
-        </p:nvSpPr>
-        <p:spPr/>
-        <p:txBody>
-          <a:bodyPr/>
-          <a:lstStyle/>
-          <a:p>
-            <a:endParaRPr/>
-          </a:p>
-        </p:txBody>
-      </p:sp>
-    </p:spTree>
-    <p:extLst>
-      <p:ext uri="{BB962C8B-B14F-4D97-AF65-F5344CB8AC3E}">
-        <p14:creationId xmlns:p14="http://schemas.microsoft.com/office/powerpoint/2010/main" val="1800024884"/>
-      </p:ext>
-    </p:extLst>
-  </p:cSld>
-  <p:clrMapOvr>
-    <a:masterClrMapping/>
-  </p:clrMapOvr>
-</p:notes>
-</file>
-
-<file path=ppt/notesSlides/notesSlide8.xml><?xml version="1.0" encoding="utf-8"?>
-<p:notes xmlns:a="http://schemas.openxmlformats.org/drawingml/2006/main" xmlns:r="http://schemas.openxmlformats.org/officeDocument/2006/relationships" xmlns:p="http://schemas.openxmlformats.org/presentationml/2006/main">
-  <p:cSld>
-    <p:spTree>
-      <p:nvGrpSpPr>
-        <p:cNvPr id="1" name=""/>
-        <p:cNvGrpSpPr/>
-        <p:nvPr/>
-      </p:nvGrpSpPr>
-      <p:grpSpPr>
-        <a:xfrm>
-          <a:off x="0" y="0"/>
-          <a:ext cx="0" cy="0"/>
-          <a:chOff x="0" y="0"/>
-          <a:chExt cx="0" cy="0"/>
-        </a:xfrm>
-      </p:grpSpPr>
-      <p:sp>
-        <p:nvSpPr>
-          <p:cNvPr id="2" name="Slide Image Placeholder 1"/>
-          <p:cNvSpPr>
-            <a:spLocks noGrp="1" noRot="1" noChangeAspect="1"/>
-          </p:cNvSpPr>
-          <p:nvPr>
-            <p:ph type="sldImg"/>
-          </p:nvPr>
-        </p:nvSpPr>
-        <p:spPr/>
-        <p:txBody>
-          <a:bodyPr/>
-          <a:lstStyle/>
-          <a:p>
-            <a:endParaRPr lang="zh-TW" altLang="en-US"/>
-          </a:p>
-        </p:txBody>
-      </p:sp>
-      <p:sp>
-        <p:nvSpPr>
-          <p:cNvPr id="3" name="Notes Placeholder 2"/>
-          <p:cNvSpPr>
-            <a:spLocks noGrp="1"/>
-          </p:cNvSpPr>
-          <p:nvPr>
-            <p:ph type="body" idx="1"/>
-          </p:nvPr>
-        </p:nvSpPr>
-        <p:spPr/>
-        <p:txBody>
-          <a:bodyPr/>
-          <a:lstStyle/>
-          <a:p>
-            <a:endParaRPr/>
-          </a:p>
-        </p:txBody>
-      </p:sp>
-      <p:sp>
-        <p:nvSpPr>
-          <p:cNvPr id="4" name="Slide Number Placeholder 3"/>
-          <p:cNvSpPr>
-            <a:spLocks noGrp="1"/>
-          </p:cNvSpPr>
-          <p:nvPr>
-            <p:ph type="sldNum" idx="5"/>
-          </p:nvPr>
-        </p:nvSpPr>
-        <p:spPr/>
-        <p:txBody>
-          <a:bodyPr/>
-          <a:lstStyle/>
-          <a:p>
-            <a:endParaRPr/>
-          </a:p>
-        </p:txBody>
-      </p:sp>
-    </p:spTree>
-  </p:cSld>
-  <p:clrMapOvr>
-    <a:masterClrMapping/>
-  </p:clrMapOvr>
-</p:notes>
-</file>
-
-<file path=ppt/notesSlides/notesSlide9.xml><?xml version="1.0" encoding="utf-8"?>
 <p:notes xmlns:a="http://schemas.openxmlformats.org/drawingml/2006/main" xmlns:r="http://schemas.openxmlformats.org/officeDocument/2006/relationships" xmlns:p="http://schemas.openxmlformats.org/presentationml/2006/main">
   <p:cSld>
     <p:spTree>
@@ -2105,6 +522,26 @@
           <a:bodyPr/>
           <a:lstStyle/>
           <a:p>
+            <a:r>
+              <a:rPr lang="en-US" altLang="zh-TW" dirty="0"/>
+              <a:t>AP </a:t>
+            </a:r>
+            <a:r>
+              <a:rPr lang="zh-TW" altLang="en-US" dirty="0"/>
+              <a:t>天線可調整方向 會影響 </a:t>
+            </a:r>
+            <a:r>
+              <a:rPr lang="en-US" altLang="zh-TW" dirty="0"/>
+              <a:t>Steering Vector </a:t>
+            </a:r>
+            <a:r>
+              <a:rPr lang="zh-TW" altLang="en-US" dirty="0"/>
+              <a:t>的計算或正確性嗎</a:t>
+            </a:r>
+            <a:r>
+              <a:rPr lang="en-US" altLang="zh-TW" dirty="0"/>
+              <a:t>?</a:t>
+            </a:r>
             <a:endParaRPr lang="zh-TW" altLang="en-US" dirty="0"/>
           </a:p>
         </p:txBody>
@@ -2132,6 +569,1977 @@
     <p:extLst>
       <p:ext uri="{BB962C8B-B14F-4D97-AF65-F5344CB8AC3E}">
         <p14:creationId xmlns:p14="http://schemas.microsoft.com/office/powerpoint/2010/main" val="1120345768"/>
+      </p:ext>
+    </p:extLst>
+  </p:cSld>
+  <p:clrMapOvr>
+    <a:masterClrMapping/>
+  </p:clrMapOvr>
+</p:notes>
+</file>
+
+<file path=ppt/notesSlides/notesSlide12.xml><?xml version="1.0" encoding="utf-8"?>
+<p:notes xmlns:a="http://schemas.openxmlformats.org/drawingml/2006/main" xmlns:r="http://schemas.openxmlformats.org/officeDocument/2006/relationships" xmlns:p="http://schemas.openxmlformats.org/presentationml/2006/main">
+  <p:cSld>
+    <p:spTree>
+      <p:nvGrpSpPr>
+        <p:cNvPr id="1" name=""/>
+        <p:cNvGrpSpPr/>
+        <p:nvPr/>
+      </p:nvGrpSpPr>
+      <p:grpSpPr>
+        <a:xfrm>
+          <a:off x="0" y="0"/>
+          <a:ext cx="0" cy="0"/>
+          <a:chOff x="0" y="0"/>
+          <a:chExt cx="0" cy="0"/>
+        </a:xfrm>
+      </p:grpSpPr>
+      <p:sp>
+        <p:nvSpPr>
+          <p:cNvPr id="2" name="Slide Image Placeholder 1"/>
+          <p:cNvSpPr>
+            <a:spLocks noGrp="1" noRot="1" noChangeAspect="1"/>
+          </p:cNvSpPr>
+          <p:nvPr>
+            <p:ph type="sldImg"/>
+          </p:nvPr>
+        </p:nvSpPr>
+        <p:spPr/>
+        <p:txBody>
+          <a:bodyPr/>
+          <a:lstStyle/>
+          <a:p>
+            <a:endParaRPr lang="zh-TW" altLang="en-US"/>
+          </a:p>
+        </p:txBody>
+      </p:sp>
+      <p:sp>
+        <p:nvSpPr>
+          <p:cNvPr id="3" name="Notes Placeholder 2"/>
+          <p:cNvSpPr>
+            <a:spLocks noGrp="1"/>
+          </p:cNvSpPr>
+          <p:nvPr>
+            <p:ph type="body" idx="1"/>
+          </p:nvPr>
+        </p:nvSpPr>
+        <p:spPr/>
+        <p:txBody>
+          <a:bodyPr/>
+          <a:lstStyle/>
+          <a:p>
+            <a:endParaRPr/>
+          </a:p>
+        </p:txBody>
+      </p:sp>
+      <p:sp>
+        <p:nvSpPr>
+          <p:cNvPr id="4" name="Slide Number Placeholder 3"/>
+          <p:cNvSpPr>
+            <a:spLocks noGrp="1"/>
+          </p:cNvSpPr>
+          <p:nvPr>
+            <p:ph type="sldNum" idx="5"/>
+          </p:nvPr>
+        </p:nvSpPr>
+        <p:spPr/>
+        <p:txBody>
+          <a:bodyPr/>
+          <a:lstStyle/>
+          <a:p>
+            <a:endParaRPr/>
+          </a:p>
+        </p:txBody>
+      </p:sp>
+    </p:spTree>
+    <p:extLst>
+      <p:ext uri="{BB962C8B-B14F-4D97-AF65-F5344CB8AC3E}">
+        <p14:creationId xmlns:p14="http://schemas.microsoft.com/office/powerpoint/2010/main" val="1608574538"/>
+      </p:ext>
+    </p:extLst>
+  </p:cSld>
+  <p:clrMapOvr>
+    <a:masterClrMapping/>
+  </p:clrMapOvr>
+</p:notes>
+</file>
+
+<file path=ppt/notesSlides/notesSlide13.xml><?xml version="1.0" encoding="utf-8"?>
+<p:notes xmlns:a="http://schemas.openxmlformats.org/drawingml/2006/main" xmlns:r="http://schemas.openxmlformats.org/officeDocument/2006/relationships" xmlns:p="http://schemas.openxmlformats.org/presentationml/2006/main">
+  <p:cSld>
+    <p:spTree>
+      <p:nvGrpSpPr>
+        <p:cNvPr id="1" name=""/>
+        <p:cNvGrpSpPr/>
+        <p:nvPr/>
+      </p:nvGrpSpPr>
+      <p:grpSpPr>
+        <a:xfrm>
+          <a:off x="0" y="0"/>
+          <a:ext cx="0" cy="0"/>
+          <a:chOff x="0" y="0"/>
+          <a:chExt cx="0" cy="0"/>
+        </a:xfrm>
+      </p:grpSpPr>
+      <p:sp>
+        <p:nvSpPr>
+          <p:cNvPr id="2" name="Slide Image Placeholder 1"/>
+          <p:cNvSpPr>
+            <a:spLocks noGrp="1" noRot="1" noChangeAspect="1"/>
+          </p:cNvSpPr>
+          <p:nvPr>
+            <p:ph type="sldImg"/>
+          </p:nvPr>
+        </p:nvSpPr>
+        <p:spPr/>
+        <p:txBody>
+          <a:bodyPr/>
+          <a:lstStyle/>
+          <a:p>
+            <a:endParaRPr lang="zh-TW" altLang="en-US"/>
+          </a:p>
+        </p:txBody>
+      </p:sp>
+      <p:sp>
+        <p:nvSpPr>
+          <p:cNvPr id="3" name="Notes Placeholder 2"/>
+          <p:cNvSpPr>
+            <a:spLocks noGrp="1"/>
+          </p:cNvSpPr>
+          <p:nvPr>
+            <p:ph type="body" idx="1"/>
+          </p:nvPr>
+        </p:nvSpPr>
+        <p:spPr/>
+        <p:txBody>
+          <a:bodyPr/>
+          <a:lstStyle/>
+          <a:p>
+            <a:endParaRPr/>
+          </a:p>
+        </p:txBody>
+      </p:sp>
+      <p:sp>
+        <p:nvSpPr>
+          <p:cNvPr id="4" name="Slide Number Placeholder 3"/>
+          <p:cNvSpPr>
+            <a:spLocks noGrp="1"/>
+          </p:cNvSpPr>
+          <p:nvPr>
+            <p:ph type="sldNum" idx="5"/>
+          </p:nvPr>
+        </p:nvSpPr>
+        <p:spPr/>
+        <p:txBody>
+          <a:bodyPr/>
+          <a:lstStyle/>
+          <a:p>
+            <a:endParaRPr/>
+          </a:p>
+        </p:txBody>
+      </p:sp>
+    </p:spTree>
+  </p:cSld>
+  <p:clrMapOvr>
+    <a:masterClrMapping/>
+  </p:clrMapOvr>
+</p:notes>
+</file>
+
+<file path=ppt/notesSlides/notesSlide14.xml><?xml version="1.0" encoding="utf-8"?>
+<p:notes xmlns:a="http://schemas.openxmlformats.org/drawingml/2006/main" xmlns:r="http://schemas.openxmlformats.org/officeDocument/2006/relationships" xmlns:p="http://schemas.openxmlformats.org/presentationml/2006/main">
+  <p:cSld>
+    <p:spTree>
+      <p:nvGrpSpPr>
+        <p:cNvPr id="1" name=""/>
+        <p:cNvGrpSpPr/>
+        <p:nvPr/>
+      </p:nvGrpSpPr>
+      <p:grpSpPr>
+        <a:xfrm>
+          <a:off x="0" y="0"/>
+          <a:ext cx="0" cy="0"/>
+          <a:chOff x="0" y="0"/>
+          <a:chExt cx="0" cy="0"/>
+        </a:xfrm>
+      </p:grpSpPr>
+      <p:sp>
+        <p:nvSpPr>
+          <p:cNvPr id="2" name="Slide Image Placeholder 1"/>
+          <p:cNvSpPr>
+            <a:spLocks noGrp="1" noRot="1" noChangeAspect="1"/>
+          </p:cNvSpPr>
+          <p:nvPr>
+            <p:ph type="sldImg"/>
+          </p:nvPr>
+        </p:nvSpPr>
+        <p:spPr/>
+        <p:txBody>
+          <a:bodyPr/>
+          <a:lstStyle/>
+          <a:p>
+            <a:endParaRPr lang="zh-TW" altLang="en-US"/>
+          </a:p>
+        </p:txBody>
+      </p:sp>
+      <p:sp>
+        <p:nvSpPr>
+          <p:cNvPr id="3" name="Notes Placeholder 2"/>
+          <p:cNvSpPr>
+            <a:spLocks noGrp="1"/>
+          </p:cNvSpPr>
+          <p:nvPr>
+            <p:ph type="body" idx="1"/>
+          </p:nvPr>
+        </p:nvSpPr>
+        <p:spPr/>
+        <p:txBody>
+          <a:bodyPr/>
+          <a:lstStyle/>
+          <a:p>
+            <a:endParaRPr/>
+          </a:p>
+        </p:txBody>
+      </p:sp>
+      <p:sp>
+        <p:nvSpPr>
+          <p:cNvPr id="4" name="Slide Number Placeholder 3"/>
+          <p:cNvSpPr>
+            <a:spLocks noGrp="1"/>
+          </p:cNvSpPr>
+          <p:nvPr>
+            <p:ph type="sldNum" idx="5"/>
+          </p:nvPr>
+        </p:nvSpPr>
+        <p:spPr/>
+        <p:txBody>
+          <a:bodyPr/>
+          <a:lstStyle/>
+          <a:p>
+            <a:endParaRPr/>
+          </a:p>
+        </p:txBody>
+      </p:sp>
+    </p:spTree>
+    <p:extLst>
+      <p:ext uri="{BB962C8B-B14F-4D97-AF65-F5344CB8AC3E}">
+        <p14:creationId xmlns:p14="http://schemas.microsoft.com/office/powerpoint/2010/main" val="3072388332"/>
+      </p:ext>
+    </p:extLst>
+  </p:cSld>
+  <p:clrMapOvr>
+    <a:masterClrMapping/>
+  </p:clrMapOvr>
+</p:notes>
+</file>
+
+<file path=ppt/notesSlides/notesSlide15.xml><?xml version="1.0" encoding="utf-8"?>
+<p:notes xmlns:a="http://schemas.openxmlformats.org/drawingml/2006/main" xmlns:r="http://schemas.openxmlformats.org/officeDocument/2006/relationships" xmlns:p="http://schemas.openxmlformats.org/presentationml/2006/main">
+  <p:cSld>
+    <p:spTree>
+      <p:nvGrpSpPr>
+        <p:cNvPr id="1" name=""/>
+        <p:cNvGrpSpPr/>
+        <p:nvPr/>
+      </p:nvGrpSpPr>
+      <p:grpSpPr>
+        <a:xfrm>
+          <a:off x="0" y="0"/>
+          <a:ext cx="0" cy="0"/>
+          <a:chOff x="0" y="0"/>
+          <a:chExt cx="0" cy="0"/>
+        </a:xfrm>
+      </p:grpSpPr>
+      <p:sp>
+        <p:nvSpPr>
+          <p:cNvPr id="2" name="Slide Image Placeholder 1"/>
+          <p:cNvSpPr>
+            <a:spLocks noGrp="1" noRot="1" noChangeAspect="1"/>
+          </p:cNvSpPr>
+          <p:nvPr>
+            <p:ph type="sldImg"/>
+          </p:nvPr>
+        </p:nvSpPr>
+        <p:spPr/>
+        <p:txBody>
+          <a:bodyPr/>
+          <a:lstStyle/>
+          <a:p>
+            <a:endParaRPr lang="zh-TW" altLang="en-US"/>
+          </a:p>
+        </p:txBody>
+      </p:sp>
+      <p:sp>
+        <p:nvSpPr>
+          <p:cNvPr id="3" name="Notes Placeholder 2"/>
+          <p:cNvSpPr>
+            <a:spLocks noGrp="1"/>
+          </p:cNvSpPr>
+          <p:nvPr>
+            <p:ph type="body" idx="1"/>
+          </p:nvPr>
+        </p:nvSpPr>
+        <p:spPr/>
+        <p:txBody>
+          <a:bodyPr/>
+          <a:lstStyle/>
+          <a:p>
+            <a:endParaRPr/>
+          </a:p>
+        </p:txBody>
+      </p:sp>
+      <p:sp>
+        <p:nvSpPr>
+          <p:cNvPr id="4" name="Slide Number Placeholder 3"/>
+          <p:cNvSpPr>
+            <a:spLocks noGrp="1"/>
+          </p:cNvSpPr>
+          <p:nvPr>
+            <p:ph type="sldNum" idx="5"/>
+          </p:nvPr>
+        </p:nvSpPr>
+        <p:spPr/>
+        <p:txBody>
+          <a:bodyPr/>
+          <a:lstStyle/>
+          <a:p>
+            <a:endParaRPr/>
+          </a:p>
+        </p:txBody>
+      </p:sp>
+    </p:spTree>
+  </p:cSld>
+  <p:clrMapOvr>
+    <a:masterClrMapping/>
+  </p:clrMapOvr>
+</p:notes>
+</file>
+
+<file path=ppt/notesSlides/notesSlide16.xml><?xml version="1.0" encoding="utf-8"?>
+<p:notes xmlns:a="http://schemas.openxmlformats.org/drawingml/2006/main" xmlns:r="http://schemas.openxmlformats.org/officeDocument/2006/relationships" xmlns:p="http://schemas.openxmlformats.org/presentationml/2006/main">
+  <p:cSld>
+    <p:spTree>
+      <p:nvGrpSpPr>
+        <p:cNvPr id="1" name=""/>
+        <p:cNvGrpSpPr/>
+        <p:nvPr/>
+      </p:nvGrpSpPr>
+      <p:grpSpPr>
+        <a:xfrm>
+          <a:off x="0" y="0"/>
+          <a:ext cx="0" cy="0"/>
+          <a:chOff x="0" y="0"/>
+          <a:chExt cx="0" cy="0"/>
+        </a:xfrm>
+      </p:grpSpPr>
+      <p:sp>
+        <p:nvSpPr>
+          <p:cNvPr id="2" name="Slide Image Placeholder 1"/>
+          <p:cNvSpPr>
+            <a:spLocks noGrp="1" noRot="1" noChangeAspect="1"/>
+          </p:cNvSpPr>
+          <p:nvPr>
+            <p:ph type="sldImg"/>
+          </p:nvPr>
+        </p:nvSpPr>
+        <p:spPr/>
+        <p:txBody>
+          <a:bodyPr/>
+          <a:lstStyle/>
+          <a:p>
+            <a:endParaRPr lang="zh-TW" altLang="en-US"/>
+          </a:p>
+        </p:txBody>
+      </p:sp>
+      <p:sp>
+        <p:nvSpPr>
+          <p:cNvPr id="3" name="Notes Placeholder 2"/>
+          <p:cNvSpPr>
+            <a:spLocks noGrp="1"/>
+          </p:cNvSpPr>
+          <p:nvPr>
+            <p:ph type="body" idx="1"/>
+          </p:nvPr>
+        </p:nvSpPr>
+        <p:spPr/>
+        <p:txBody>
+          <a:bodyPr/>
+          <a:lstStyle/>
+          <a:p>
+            <a:endParaRPr/>
+          </a:p>
+        </p:txBody>
+      </p:sp>
+      <p:sp>
+        <p:nvSpPr>
+          <p:cNvPr id="4" name="Slide Number Placeholder 3"/>
+          <p:cNvSpPr>
+            <a:spLocks noGrp="1"/>
+          </p:cNvSpPr>
+          <p:nvPr>
+            <p:ph type="sldNum" idx="5"/>
+          </p:nvPr>
+        </p:nvSpPr>
+        <p:spPr/>
+        <p:txBody>
+          <a:bodyPr/>
+          <a:lstStyle/>
+          <a:p>
+            <a:endParaRPr/>
+          </a:p>
+        </p:txBody>
+      </p:sp>
+    </p:spTree>
+  </p:cSld>
+  <p:clrMapOvr>
+    <a:masterClrMapping/>
+  </p:clrMapOvr>
+</p:notes>
+</file>
+
+<file path=ppt/notesSlides/notesSlide17.xml><?xml version="1.0" encoding="utf-8"?>
+<p:notes xmlns:a="http://schemas.openxmlformats.org/drawingml/2006/main" xmlns:r="http://schemas.openxmlformats.org/officeDocument/2006/relationships" xmlns:p="http://schemas.openxmlformats.org/presentationml/2006/main">
+  <p:cSld>
+    <p:spTree>
+      <p:nvGrpSpPr>
+        <p:cNvPr id="1" name=""/>
+        <p:cNvGrpSpPr/>
+        <p:nvPr/>
+      </p:nvGrpSpPr>
+      <p:grpSpPr>
+        <a:xfrm>
+          <a:off x="0" y="0"/>
+          <a:ext cx="0" cy="0"/>
+          <a:chOff x="0" y="0"/>
+          <a:chExt cx="0" cy="0"/>
+        </a:xfrm>
+      </p:grpSpPr>
+      <p:sp>
+        <p:nvSpPr>
+          <p:cNvPr id="2" name="Slide Image Placeholder 1"/>
+          <p:cNvSpPr>
+            <a:spLocks noGrp="1" noRot="1" noChangeAspect="1"/>
+          </p:cNvSpPr>
+          <p:nvPr>
+            <p:ph type="sldImg"/>
+          </p:nvPr>
+        </p:nvSpPr>
+        <p:spPr/>
+        <p:txBody>
+          <a:bodyPr/>
+          <a:lstStyle/>
+          <a:p>
+            <a:endParaRPr lang="zh-TW" altLang="en-US"/>
+          </a:p>
+        </p:txBody>
+      </p:sp>
+      <p:sp>
+        <p:nvSpPr>
+          <p:cNvPr id="3" name="Notes Placeholder 2"/>
+          <p:cNvSpPr>
+            <a:spLocks noGrp="1"/>
+          </p:cNvSpPr>
+          <p:nvPr>
+            <p:ph type="body" idx="1"/>
+          </p:nvPr>
+        </p:nvSpPr>
+        <p:spPr/>
+        <p:txBody>
+          <a:bodyPr/>
+          <a:lstStyle/>
+          <a:p>
+            <a:endParaRPr/>
+          </a:p>
+        </p:txBody>
+      </p:sp>
+      <p:sp>
+        <p:nvSpPr>
+          <p:cNvPr id="4" name="Slide Number Placeholder 3"/>
+          <p:cNvSpPr>
+            <a:spLocks noGrp="1"/>
+          </p:cNvSpPr>
+          <p:nvPr>
+            <p:ph type="sldNum" idx="5"/>
+          </p:nvPr>
+        </p:nvSpPr>
+        <p:spPr/>
+        <p:txBody>
+          <a:bodyPr/>
+          <a:lstStyle/>
+          <a:p>
+            <a:endParaRPr/>
+          </a:p>
+        </p:txBody>
+      </p:sp>
+    </p:spTree>
+  </p:cSld>
+  <p:clrMapOvr>
+    <a:masterClrMapping/>
+  </p:clrMapOvr>
+</p:notes>
+</file>
+
+<file path=ppt/notesSlides/notesSlide18.xml><?xml version="1.0" encoding="utf-8"?>
+<p:notes xmlns:a="http://schemas.openxmlformats.org/drawingml/2006/main" xmlns:r="http://schemas.openxmlformats.org/officeDocument/2006/relationships" xmlns:p="http://schemas.openxmlformats.org/presentationml/2006/main">
+  <p:cSld>
+    <p:spTree>
+      <p:nvGrpSpPr>
+        <p:cNvPr id="1" name="">
+          <a:extLst>
+            <a:ext uri="{FF2B5EF4-FFF2-40B4-BE49-F238E27FC236}">
+              <a16:creationId xmlns:a16="http://schemas.microsoft.com/office/drawing/2014/main" id="{C7C28AFD-031B-0436-DE48-43D141BD1D37}"/>
+            </a:ext>
+          </a:extLst>
+        </p:cNvPr>
+        <p:cNvGrpSpPr/>
+        <p:nvPr/>
+      </p:nvGrpSpPr>
+      <p:grpSpPr>
+        <a:xfrm>
+          <a:off x="0" y="0"/>
+          <a:ext cx="0" cy="0"/>
+          <a:chOff x="0" y="0"/>
+          <a:chExt cx="0" cy="0"/>
+        </a:xfrm>
+      </p:grpSpPr>
+      <p:sp>
+        <p:nvSpPr>
+          <p:cNvPr id="2" name="Slide Image Placeholder 1">
+            <a:extLst>
+              <a:ext uri="{FF2B5EF4-FFF2-40B4-BE49-F238E27FC236}">
+                <a16:creationId xmlns:a16="http://schemas.microsoft.com/office/drawing/2014/main" id="{E893E3A4-B1A7-2C29-A3BB-1AC7E6D387C9}"/>
+              </a:ext>
+            </a:extLst>
+          </p:cNvPr>
+          <p:cNvSpPr>
+            <a:spLocks noGrp="1" noRot="1" noChangeAspect="1"/>
+          </p:cNvSpPr>
+          <p:nvPr>
+            <p:ph type="sldImg"/>
+          </p:nvPr>
+        </p:nvSpPr>
+        <p:spPr/>
+        <p:txBody>
+          <a:bodyPr/>
+          <a:lstStyle/>
+          <a:p>
+            <a:endParaRPr lang="zh-TW" altLang="en-US"/>
+          </a:p>
+        </p:txBody>
+      </p:sp>
+      <p:sp>
+        <p:nvSpPr>
+          <p:cNvPr id="3" name="Notes Placeholder 2">
+            <a:extLst>
+              <a:ext uri="{FF2B5EF4-FFF2-40B4-BE49-F238E27FC236}">
+                <a16:creationId xmlns:a16="http://schemas.microsoft.com/office/drawing/2014/main" id="{160C6BEB-B163-351B-D7A5-C9DE472754D5}"/>
+              </a:ext>
+            </a:extLst>
+          </p:cNvPr>
+          <p:cNvSpPr>
+            <a:spLocks noGrp="1"/>
+          </p:cNvSpPr>
+          <p:nvPr>
+            <p:ph type="body" idx="1"/>
+          </p:nvPr>
+        </p:nvSpPr>
+        <p:spPr/>
+        <p:txBody>
+          <a:bodyPr/>
+          <a:lstStyle/>
+          <a:p>
+            <a:endParaRPr/>
+          </a:p>
+        </p:txBody>
+      </p:sp>
+      <p:sp>
+        <p:nvSpPr>
+          <p:cNvPr id="4" name="Slide Number Placeholder 3">
+            <a:extLst>
+              <a:ext uri="{FF2B5EF4-FFF2-40B4-BE49-F238E27FC236}">
+                <a16:creationId xmlns:a16="http://schemas.microsoft.com/office/drawing/2014/main" id="{6292EBE5-E60A-E884-12FE-D8E2CA7D7928}"/>
+              </a:ext>
+            </a:extLst>
+          </p:cNvPr>
+          <p:cNvSpPr>
+            <a:spLocks noGrp="1"/>
+          </p:cNvSpPr>
+          <p:nvPr>
+            <p:ph type="sldNum" idx="5"/>
+          </p:nvPr>
+        </p:nvSpPr>
+        <p:spPr/>
+        <p:txBody>
+          <a:bodyPr/>
+          <a:lstStyle/>
+          <a:p>
+            <a:endParaRPr/>
+          </a:p>
+        </p:txBody>
+      </p:sp>
+    </p:spTree>
+    <p:extLst>
+      <p:ext uri="{BB962C8B-B14F-4D97-AF65-F5344CB8AC3E}">
+        <p14:creationId xmlns:p14="http://schemas.microsoft.com/office/powerpoint/2010/main" val="267916886"/>
+      </p:ext>
+    </p:extLst>
+  </p:cSld>
+  <p:clrMapOvr>
+    <a:masterClrMapping/>
+  </p:clrMapOvr>
+</p:notes>
+</file>
+
+<file path=ppt/notesSlides/notesSlide19.xml><?xml version="1.0" encoding="utf-8"?>
+<p:notes xmlns:a="http://schemas.openxmlformats.org/drawingml/2006/main" xmlns:r="http://schemas.openxmlformats.org/officeDocument/2006/relationships" xmlns:p="http://schemas.openxmlformats.org/presentationml/2006/main">
+  <p:cSld>
+    <p:spTree>
+      <p:nvGrpSpPr>
+        <p:cNvPr id="1" name=""/>
+        <p:cNvGrpSpPr/>
+        <p:nvPr/>
+      </p:nvGrpSpPr>
+      <p:grpSpPr>
+        <a:xfrm>
+          <a:off x="0" y="0"/>
+          <a:ext cx="0" cy="0"/>
+          <a:chOff x="0" y="0"/>
+          <a:chExt cx="0" cy="0"/>
+        </a:xfrm>
+      </p:grpSpPr>
+      <p:sp>
+        <p:nvSpPr>
+          <p:cNvPr id="2" name="Slide Image Placeholder 1"/>
+          <p:cNvSpPr>
+            <a:spLocks noGrp="1" noRot="1" noChangeAspect="1"/>
+          </p:cNvSpPr>
+          <p:nvPr>
+            <p:ph type="sldImg"/>
+          </p:nvPr>
+        </p:nvSpPr>
+        <p:spPr/>
+        <p:txBody>
+          <a:bodyPr/>
+          <a:lstStyle/>
+          <a:p>
+            <a:endParaRPr lang="zh-TW" altLang="en-US"/>
+          </a:p>
+        </p:txBody>
+      </p:sp>
+      <p:sp>
+        <p:nvSpPr>
+          <p:cNvPr id="3" name="Notes Placeholder 2"/>
+          <p:cNvSpPr>
+            <a:spLocks noGrp="1"/>
+          </p:cNvSpPr>
+          <p:nvPr>
+            <p:ph type="body" idx="1"/>
+          </p:nvPr>
+        </p:nvSpPr>
+        <p:spPr/>
+        <p:txBody>
+          <a:bodyPr/>
+          <a:lstStyle/>
+          <a:p>
+            <a:endParaRPr/>
+          </a:p>
+        </p:txBody>
+      </p:sp>
+      <p:sp>
+        <p:nvSpPr>
+          <p:cNvPr id="4" name="Slide Number Placeholder 3"/>
+          <p:cNvSpPr>
+            <a:spLocks noGrp="1"/>
+          </p:cNvSpPr>
+          <p:nvPr>
+            <p:ph type="sldNum" idx="5"/>
+          </p:nvPr>
+        </p:nvSpPr>
+        <p:spPr/>
+        <p:txBody>
+          <a:bodyPr/>
+          <a:lstStyle/>
+          <a:p>
+            <a:endParaRPr/>
+          </a:p>
+        </p:txBody>
+      </p:sp>
+    </p:spTree>
+    <p:extLst>
+      <p:ext uri="{BB962C8B-B14F-4D97-AF65-F5344CB8AC3E}">
+        <p14:creationId xmlns:p14="http://schemas.microsoft.com/office/powerpoint/2010/main" val="3088753758"/>
+      </p:ext>
+    </p:extLst>
+  </p:cSld>
+  <p:clrMapOvr>
+    <a:masterClrMapping/>
+  </p:clrMapOvr>
+</p:notes>
+</file>
+
+<file path=ppt/notesSlides/notesSlide2.xml><?xml version="1.0" encoding="utf-8"?>
+<p:notes xmlns:a="http://schemas.openxmlformats.org/drawingml/2006/main" xmlns:r="http://schemas.openxmlformats.org/officeDocument/2006/relationships" xmlns:p="http://schemas.openxmlformats.org/presentationml/2006/main">
+  <p:cSld>
+    <p:spTree>
+      <p:nvGrpSpPr>
+        <p:cNvPr id="1" name=""/>
+        <p:cNvGrpSpPr/>
+        <p:nvPr/>
+      </p:nvGrpSpPr>
+      <p:grpSpPr>
+        <a:xfrm>
+          <a:off x="0" y="0"/>
+          <a:ext cx="0" cy="0"/>
+          <a:chOff x="0" y="0"/>
+          <a:chExt cx="0" cy="0"/>
+        </a:xfrm>
+      </p:grpSpPr>
+      <p:sp>
+        <p:nvSpPr>
+          <p:cNvPr id="2" name="Slide Image Placeholder 1"/>
+          <p:cNvSpPr>
+            <a:spLocks noGrp="1" noRot="1" noChangeAspect="1"/>
+          </p:cNvSpPr>
+          <p:nvPr>
+            <p:ph type="sldImg"/>
+          </p:nvPr>
+        </p:nvSpPr>
+        <p:spPr/>
+        <p:txBody>
+          <a:bodyPr/>
+          <a:lstStyle/>
+          <a:p>
+            <a:endParaRPr lang="zh-TW" altLang="en-US"/>
+          </a:p>
+        </p:txBody>
+      </p:sp>
+      <p:sp>
+        <p:nvSpPr>
+          <p:cNvPr id="3" name="Notes Placeholder 2"/>
+          <p:cNvSpPr>
+            <a:spLocks noGrp="1"/>
+          </p:cNvSpPr>
+          <p:nvPr>
+            <p:ph type="body" idx="1"/>
+          </p:nvPr>
+        </p:nvSpPr>
+        <p:spPr/>
+        <p:txBody>
+          <a:bodyPr/>
+          <a:lstStyle/>
+          <a:p>
+            <a:endParaRPr/>
+          </a:p>
+        </p:txBody>
+      </p:sp>
+      <p:sp>
+        <p:nvSpPr>
+          <p:cNvPr id="4" name="Slide Number Placeholder 3"/>
+          <p:cNvSpPr>
+            <a:spLocks noGrp="1"/>
+          </p:cNvSpPr>
+          <p:nvPr>
+            <p:ph type="sldNum" idx="5"/>
+          </p:nvPr>
+        </p:nvSpPr>
+        <p:spPr/>
+        <p:txBody>
+          <a:bodyPr/>
+          <a:lstStyle/>
+          <a:p>
+            <a:endParaRPr/>
+          </a:p>
+        </p:txBody>
+      </p:sp>
+    </p:spTree>
+  </p:cSld>
+  <p:clrMapOvr>
+    <a:masterClrMapping/>
+  </p:clrMapOvr>
+</p:notes>
+</file>
+
+<file path=ppt/notesSlides/notesSlide20.xml><?xml version="1.0" encoding="utf-8"?>
+<p:notes xmlns:a="http://schemas.openxmlformats.org/drawingml/2006/main" xmlns:r="http://schemas.openxmlformats.org/officeDocument/2006/relationships" xmlns:p="http://schemas.openxmlformats.org/presentationml/2006/main">
+  <p:cSld>
+    <p:spTree>
+      <p:nvGrpSpPr>
+        <p:cNvPr id="1" name=""/>
+        <p:cNvGrpSpPr/>
+        <p:nvPr/>
+      </p:nvGrpSpPr>
+      <p:grpSpPr>
+        <a:xfrm>
+          <a:off x="0" y="0"/>
+          <a:ext cx="0" cy="0"/>
+          <a:chOff x="0" y="0"/>
+          <a:chExt cx="0" cy="0"/>
+        </a:xfrm>
+      </p:grpSpPr>
+      <p:sp>
+        <p:nvSpPr>
+          <p:cNvPr id="2" name="Slide Image Placeholder 1"/>
+          <p:cNvSpPr>
+            <a:spLocks noGrp="1" noRot="1" noChangeAspect="1"/>
+          </p:cNvSpPr>
+          <p:nvPr>
+            <p:ph type="sldImg"/>
+          </p:nvPr>
+        </p:nvSpPr>
+        <p:spPr/>
+        <p:txBody>
+          <a:bodyPr/>
+          <a:lstStyle/>
+          <a:p>
+            <a:endParaRPr lang="zh-TW" altLang="en-US"/>
+          </a:p>
+        </p:txBody>
+      </p:sp>
+      <p:sp>
+        <p:nvSpPr>
+          <p:cNvPr id="3" name="Notes Placeholder 2"/>
+          <p:cNvSpPr>
+            <a:spLocks noGrp="1"/>
+          </p:cNvSpPr>
+          <p:nvPr>
+            <p:ph type="body" idx="1"/>
+          </p:nvPr>
+        </p:nvSpPr>
+        <p:spPr/>
+        <p:txBody>
+          <a:bodyPr/>
+          <a:lstStyle/>
+          <a:p>
+            <a:r>
+              <a:rPr lang="en-US" dirty="0"/>
+              <a:t>https://www.sciencedirect.com/topics/engineering/phasor-representation</a:t>
+            </a:r>
+            <a:r>
+              <a:rPr lang="zh-TW" altLang="en-US" dirty="0"/>
+              <a:t> </a:t>
+            </a:r>
+            <a:endParaRPr lang="en-US" altLang="zh-TW" dirty="0"/>
+          </a:p>
+          <a:p>
+            <a:endParaRPr lang="en-US" dirty="0"/>
+          </a:p>
+          <a:p>
+            <a:r>
+              <a:rPr lang="en-US" altLang="zh-TW" dirty="0"/>
+              <a:t>CSI=transmitted reference signal / received signal​</a:t>
+            </a:r>
+            <a:endParaRPr dirty="0"/>
+          </a:p>
+        </p:txBody>
+      </p:sp>
+      <p:sp>
+        <p:nvSpPr>
+          <p:cNvPr id="4" name="Slide Number Placeholder 3"/>
+          <p:cNvSpPr>
+            <a:spLocks noGrp="1"/>
+          </p:cNvSpPr>
+          <p:nvPr>
+            <p:ph type="sldNum" idx="5"/>
+          </p:nvPr>
+        </p:nvSpPr>
+        <p:spPr/>
+        <p:txBody>
+          <a:bodyPr/>
+          <a:lstStyle/>
+          <a:p>
+            <a:endParaRPr/>
+          </a:p>
+        </p:txBody>
+      </p:sp>
+    </p:spTree>
+    <p:extLst>
+      <p:ext uri="{BB962C8B-B14F-4D97-AF65-F5344CB8AC3E}">
+        <p14:creationId xmlns:p14="http://schemas.microsoft.com/office/powerpoint/2010/main" val="269360236"/>
+      </p:ext>
+    </p:extLst>
+  </p:cSld>
+  <p:clrMapOvr>
+    <a:masterClrMapping/>
+  </p:clrMapOvr>
+</p:notes>
+</file>
+
+<file path=ppt/notesSlides/notesSlide21.xml><?xml version="1.0" encoding="utf-8"?>
+<p:notes xmlns:a="http://schemas.openxmlformats.org/drawingml/2006/main" xmlns:r="http://schemas.openxmlformats.org/officeDocument/2006/relationships" xmlns:p="http://schemas.openxmlformats.org/presentationml/2006/main">
+  <p:cSld>
+    <p:spTree>
+      <p:nvGrpSpPr>
+        <p:cNvPr id="1" name=""/>
+        <p:cNvGrpSpPr/>
+        <p:nvPr/>
+      </p:nvGrpSpPr>
+      <p:grpSpPr>
+        <a:xfrm>
+          <a:off x="0" y="0"/>
+          <a:ext cx="0" cy="0"/>
+          <a:chOff x="0" y="0"/>
+          <a:chExt cx="0" cy="0"/>
+        </a:xfrm>
+      </p:grpSpPr>
+      <p:sp>
+        <p:nvSpPr>
+          <p:cNvPr id="2" name="Slide Image Placeholder 1"/>
+          <p:cNvSpPr>
+            <a:spLocks noGrp="1" noRot="1" noChangeAspect="1"/>
+          </p:cNvSpPr>
+          <p:nvPr>
+            <p:ph type="sldImg"/>
+          </p:nvPr>
+        </p:nvSpPr>
+        <p:spPr/>
+        <p:txBody>
+          <a:bodyPr/>
+          <a:lstStyle/>
+          <a:p>
+            <a:endParaRPr lang="zh-TW" altLang="en-US"/>
+          </a:p>
+        </p:txBody>
+      </p:sp>
+      <p:sp>
+        <p:nvSpPr>
+          <p:cNvPr id="3" name="Notes Placeholder 2"/>
+          <p:cNvSpPr>
+            <a:spLocks noGrp="1"/>
+          </p:cNvSpPr>
+          <p:nvPr>
+            <p:ph type="body" idx="1"/>
+          </p:nvPr>
+        </p:nvSpPr>
+        <p:spPr/>
+        <p:txBody>
+          <a:bodyPr/>
+          <a:lstStyle/>
+          <a:p>
+            <a:r>
+              <a:rPr lang="en-US" dirty="0"/>
+              <a:t>https://www.sciencedirect.com/science/article/pii/S209099771300031X</a:t>
+            </a:r>
+            <a:endParaRPr dirty="0"/>
+          </a:p>
+        </p:txBody>
+      </p:sp>
+      <p:sp>
+        <p:nvSpPr>
+          <p:cNvPr id="4" name="Slide Number Placeholder 3"/>
+          <p:cNvSpPr>
+            <a:spLocks noGrp="1"/>
+          </p:cNvSpPr>
+          <p:nvPr>
+            <p:ph type="sldNum" idx="5"/>
+          </p:nvPr>
+        </p:nvSpPr>
+        <p:spPr/>
+        <p:txBody>
+          <a:bodyPr/>
+          <a:lstStyle/>
+          <a:p>
+            <a:endParaRPr/>
+          </a:p>
+        </p:txBody>
+      </p:sp>
+    </p:spTree>
+    <p:extLst>
+      <p:ext uri="{BB962C8B-B14F-4D97-AF65-F5344CB8AC3E}">
+        <p14:creationId xmlns:p14="http://schemas.microsoft.com/office/powerpoint/2010/main" val="1378868269"/>
+      </p:ext>
+    </p:extLst>
+  </p:cSld>
+  <p:clrMapOvr>
+    <a:masterClrMapping/>
+  </p:clrMapOvr>
+</p:notes>
+</file>
+
+<file path=ppt/notesSlides/notesSlide22.xml><?xml version="1.0" encoding="utf-8"?>
+<p:notes xmlns:a="http://schemas.openxmlformats.org/drawingml/2006/main" xmlns:r="http://schemas.openxmlformats.org/officeDocument/2006/relationships" xmlns:p="http://schemas.openxmlformats.org/presentationml/2006/main">
+  <p:cSld>
+    <p:spTree>
+      <p:nvGrpSpPr>
+        <p:cNvPr id="1" name=""/>
+        <p:cNvGrpSpPr/>
+        <p:nvPr/>
+      </p:nvGrpSpPr>
+      <p:grpSpPr>
+        <a:xfrm>
+          <a:off x="0" y="0"/>
+          <a:ext cx="0" cy="0"/>
+          <a:chOff x="0" y="0"/>
+          <a:chExt cx="0" cy="0"/>
+        </a:xfrm>
+      </p:grpSpPr>
+      <p:sp>
+        <p:nvSpPr>
+          <p:cNvPr id="2" name="Slide Image Placeholder 1"/>
+          <p:cNvSpPr>
+            <a:spLocks noGrp="1" noRot="1" noChangeAspect="1"/>
+          </p:cNvSpPr>
+          <p:nvPr>
+            <p:ph type="sldImg"/>
+          </p:nvPr>
+        </p:nvSpPr>
+        <p:spPr/>
+        <p:txBody>
+          <a:bodyPr/>
+          <a:lstStyle/>
+          <a:p>
+            <a:endParaRPr lang="zh-TW" altLang="en-US"/>
+          </a:p>
+        </p:txBody>
+      </p:sp>
+      <p:sp>
+        <p:nvSpPr>
+          <p:cNvPr id="3" name="Notes Placeholder 2"/>
+          <p:cNvSpPr>
+            <a:spLocks noGrp="1"/>
+          </p:cNvSpPr>
+          <p:nvPr>
+            <p:ph type="body" idx="1"/>
+          </p:nvPr>
+        </p:nvSpPr>
+        <p:spPr/>
+        <p:txBody>
+          <a:bodyPr/>
+          <a:lstStyle/>
+          <a:p>
+            <a:endParaRPr/>
+          </a:p>
+        </p:txBody>
+      </p:sp>
+      <p:sp>
+        <p:nvSpPr>
+          <p:cNvPr id="4" name="Slide Number Placeholder 3"/>
+          <p:cNvSpPr>
+            <a:spLocks noGrp="1"/>
+          </p:cNvSpPr>
+          <p:nvPr>
+            <p:ph type="sldNum" idx="5"/>
+          </p:nvPr>
+        </p:nvSpPr>
+        <p:spPr/>
+        <p:txBody>
+          <a:bodyPr/>
+          <a:lstStyle/>
+          <a:p>
+            <a:endParaRPr/>
+          </a:p>
+        </p:txBody>
+      </p:sp>
+    </p:spTree>
+  </p:cSld>
+  <p:clrMapOvr>
+    <a:masterClrMapping/>
+  </p:clrMapOvr>
+</p:notes>
+</file>
+
+<file path=ppt/notesSlides/notesSlide23.xml><?xml version="1.0" encoding="utf-8"?>
+<p:notes xmlns:a="http://schemas.openxmlformats.org/drawingml/2006/main" xmlns:r="http://schemas.openxmlformats.org/officeDocument/2006/relationships" xmlns:p="http://schemas.openxmlformats.org/presentationml/2006/main">
+  <p:cSld>
+    <p:spTree>
+      <p:nvGrpSpPr>
+        <p:cNvPr id="1" name=""/>
+        <p:cNvGrpSpPr/>
+        <p:nvPr/>
+      </p:nvGrpSpPr>
+      <p:grpSpPr>
+        <a:xfrm>
+          <a:off x="0" y="0"/>
+          <a:ext cx="0" cy="0"/>
+          <a:chOff x="0" y="0"/>
+          <a:chExt cx="0" cy="0"/>
+        </a:xfrm>
+      </p:grpSpPr>
+      <p:sp>
+        <p:nvSpPr>
+          <p:cNvPr id="2" name="Slide Image Placeholder 1"/>
+          <p:cNvSpPr>
+            <a:spLocks noGrp="1" noRot="1" noChangeAspect="1"/>
+          </p:cNvSpPr>
+          <p:nvPr>
+            <p:ph type="sldImg"/>
+          </p:nvPr>
+        </p:nvSpPr>
+        <p:spPr/>
+        <p:txBody>
+          <a:bodyPr/>
+          <a:lstStyle/>
+          <a:p>
+            <a:endParaRPr lang="zh-TW" altLang="en-US"/>
+          </a:p>
+        </p:txBody>
+      </p:sp>
+      <p:sp>
+        <p:nvSpPr>
+          <p:cNvPr id="3" name="Notes Placeholder 2"/>
+          <p:cNvSpPr>
+            <a:spLocks noGrp="1"/>
+          </p:cNvSpPr>
+          <p:nvPr>
+            <p:ph type="body" idx="1"/>
+          </p:nvPr>
+        </p:nvSpPr>
+        <p:spPr/>
+        <p:txBody>
+          <a:bodyPr/>
+          <a:lstStyle/>
+          <a:p>
+            <a:endParaRPr/>
+          </a:p>
+        </p:txBody>
+      </p:sp>
+      <p:sp>
+        <p:nvSpPr>
+          <p:cNvPr id="4" name="Slide Number Placeholder 3"/>
+          <p:cNvSpPr>
+            <a:spLocks noGrp="1"/>
+          </p:cNvSpPr>
+          <p:nvPr>
+            <p:ph type="sldNum" idx="5"/>
+          </p:nvPr>
+        </p:nvSpPr>
+        <p:spPr/>
+        <p:txBody>
+          <a:bodyPr/>
+          <a:lstStyle/>
+          <a:p>
+            <a:endParaRPr/>
+          </a:p>
+        </p:txBody>
+      </p:sp>
+    </p:spTree>
+  </p:cSld>
+  <p:clrMapOvr>
+    <a:masterClrMapping/>
+  </p:clrMapOvr>
+</p:notes>
+</file>
+
+<file path=ppt/notesSlides/notesSlide3.xml><?xml version="1.0" encoding="utf-8"?>
+<p:notes xmlns:a="http://schemas.openxmlformats.org/drawingml/2006/main" xmlns:r="http://schemas.openxmlformats.org/officeDocument/2006/relationships" xmlns:p="http://schemas.openxmlformats.org/presentationml/2006/main">
+  <p:cSld>
+    <p:spTree>
+      <p:nvGrpSpPr>
+        <p:cNvPr id="1" name=""/>
+        <p:cNvGrpSpPr/>
+        <p:nvPr/>
+      </p:nvGrpSpPr>
+      <p:grpSpPr>
+        <a:xfrm>
+          <a:off x="0" y="0"/>
+          <a:ext cx="0" cy="0"/>
+          <a:chOff x="0" y="0"/>
+          <a:chExt cx="0" cy="0"/>
+        </a:xfrm>
+      </p:grpSpPr>
+      <p:sp>
+        <p:nvSpPr>
+          <p:cNvPr id="2" name="Slide Image Placeholder 1"/>
+          <p:cNvSpPr>
+            <a:spLocks noGrp="1" noRot="1" noChangeAspect="1"/>
+          </p:cNvSpPr>
+          <p:nvPr>
+            <p:ph type="sldImg"/>
+          </p:nvPr>
+        </p:nvSpPr>
+        <p:spPr/>
+        <p:txBody>
+          <a:bodyPr/>
+          <a:lstStyle/>
+          <a:p>
+            <a:endParaRPr lang="zh-TW" altLang="en-US"/>
+          </a:p>
+        </p:txBody>
+      </p:sp>
+      <p:sp>
+        <p:nvSpPr>
+          <p:cNvPr id="3" name="Notes Placeholder 2"/>
+          <p:cNvSpPr>
+            <a:spLocks noGrp="1"/>
+          </p:cNvSpPr>
+          <p:nvPr>
+            <p:ph type="body" idx="1"/>
+          </p:nvPr>
+        </p:nvSpPr>
+        <p:spPr/>
+        <p:txBody>
+          <a:bodyPr/>
+          <a:lstStyle/>
+          <a:p>
+            <a:endParaRPr/>
+          </a:p>
+        </p:txBody>
+      </p:sp>
+      <p:sp>
+        <p:nvSpPr>
+          <p:cNvPr id="4" name="Slide Number Placeholder 3"/>
+          <p:cNvSpPr>
+            <a:spLocks noGrp="1"/>
+          </p:cNvSpPr>
+          <p:nvPr>
+            <p:ph type="sldNum" idx="5"/>
+          </p:nvPr>
+        </p:nvSpPr>
+        <p:spPr/>
+        <p:txBody>
+          <a:bodyPr/>
+          <a:lstStyle/>
+          <a:p>
+            <a:endParaRPr/>
+          </a:p>
+        </p:txBody>
+      </p:sp>
+    </p:spTree>
+  </p:cSld>
+  <p:clrMapOvr>
+    <a:masterClrMapping/>
+  </p:clrMapOvr>
+</p:notes>
+</file>
+
+<file path=ppt/notesSlides/notesSlide4.xml><?xml version="1.0" encoding="utf-8"?>
+<p:notes xmlns:a="http://schemas.openxmlformats.org/drawingml/2006/main" xmlns:r="http://schemas.openxmlformats.org/officeDocument/2006/relationships" xmlns:p="http://schemas.openxmlformats.org/presentationml/2006/main">
+  <p:cSld>
+    <p:spTree>
+      <p:nvGrpSpPr>
+        <p:cNvPr id="1" name=""/>
+        <p:cNvGrpSpPr/>
+        <p:nvPr/>
+      </p:nvGrpSpPr>
+      <p:grpSpPr>
+        <a:xfrm>
+          <a:off x="0" y="0"/>
+          <a:ext cx="0" cy="0"/>
+          <a:chOff x="0" y="0"/>
+          <a:chExt cx="0" cy="0"/>
+        </a:xfrm>
+      </p:grpSpPr>
+      <p:sp>
+        <p:nvSpPr>
+          <p:cNvPr id="2" name="Slide Image Placeholder 1"/>
+          <p:cNvSpPr>
+            <a:spLocks noGrp="1" noRot="1" noChangeAspect="1"/>
+          </p:cNvSpPr>
+          <p:nvPr>
+            <p:ph type="sldImg"/>
+          </p:nvPr>
+        </p:nvSpPr>
+        <p:spPr/>
+        <p:txBody>
+          <a:bodyPr/>
+          <a:lstStyle/>
+          <a:p>
+            <a:endParaRPr lang="zh-TW" altLang="en-US"/>
+          </a:p>
+        </p:txBody>
+      </p:sp>
+      <p:sp>
+        <p:nvSpPr>
+          <p:cNvPr id="3" name="Notes Placeholder 2"/>
+          <p:cNvSpPr>
+            <a:spLocks noGrp="1"/>
+          </p:cNvSpPr>
+          <p:nvPr>
+            <p:ph type="body" idx="1"/>
+          </p:nvPr>
+        </p:nvSpPr>
+        <p:spPr/>
+        <p:txBody>
+          <a:bodyPr/>
+          <a:lstStyle/>
+          <a:p>
+            <a:endParaRPr/>
+          </a:p>
+        </p:txBody>
+      </p:sp>
+      <p:sp>
+        <p:nvSpPr>
+          <p:cNvPr id="4" name="Slide Number Placeholder 3"/>
+          <p:cNvSpPr>
+            <a:spLocks noGrp="1"/>
+          </p:cNvSpPr>
+          <p:nvPr>
+            <p:ph type="sldNum" idx="5"/>
+          </p:nvPr>
+        </p:nvSpPr>
+        <p:spPr/>
+        <p:txBody>
+          <a:bodyPr/>
+          <a:lstStyle/>
+          <a:p>
+            <a:endParaRPr/>
+          </a:p>
+        </p:txBody>
+      </p:sp>
+    </p:spTree>
+  </p:cSld>
+  <p:clrMapOvr>
+    <a:masterClrMapping/>
+  </p:clrMapOvr>
+</p:notes>
+</file>
+
+<file path=ppt/notesSlides/notesSlide5.xml><?xml version="1.0" encoding="utf-8"?>
+<p:notes xmlns:a="http://schemas.openxmlformats.org/drawingml/2006/main" xmlns:r="http://schemas.openxmlformats.org/officeDocument/2006/relationships" xmlns:p="http://schemas.openxmlformats.org/presentationml/2006/main">
+  <p:cSld>
+    <p:spTree>
+      <p:nvGrpSpPr>
+        <p:cNvPr id="1" name=""/>
+        <p:cNvGrpSpPr/>
+        <p:nvPr/>
+      </p:nvGrpSpPr>
+      <p:grpSpPr>
+        <a:xfrm>
+          <a:off x="0" y="0"/>
+          <a:ext cx="0" cy="0"/>
+          <a:chOff x="0" y="0"/>
+          <a:chExt cx="0" cy="0"/>
+        </a:xfrm>
+      </p:grpSpPr>
+      <p:sp>
+        <p:nvSpPr>
+          <p:cNvPr id="2" name="投影片影像版面配置區 1"/>
+          <p:cNvSpPr>
+            <a:spLocks noGrp="1" noRot="1" noChangeAspect="1"/>
+          </p:cNvSpPr>
+          <p:nvPr>
+            <p:ph type="sldImg"/>
+          </p:nvPr>
+        </p:nvSpPr>
+        <p:spPr/>
+      </p:sp>
+      <p:sp>
+        <p:nvSpPr>
+          <p:cNvPr id="3" name="備忘稿版面配置區 2"/>
+          <p:cNvSpPr>
+            <a:spLocks noGrp="1"/>
+          </p:cNvSpPr>
+          <p:nvPr>
+            <p:ph type="body" idx="1"/>
+          </p:nvPr>
+        </p:nvSpPr>
+        <p:spPr/>
+        <p:txBody>
+          <a:bodyPr/>
+          <a:lstStyle/>
+          <a:p>
+            <a:r>
+              <a:rPr lang="en-US" altLang="zh-TW" dirty="0"/>
+              <a:t>Frame size </a:t>
+            </a:r>
+            <a:r>
+              <a:rPr lang="zh-TW" altLang="en-US" dirty="0"/>
+              <a:t>說明</a:t>
+            </a:r>
+            <a:endParaRPr lang="en-US" altLang="zh-TW" dirty="0"/>
+          </a:p>
+          <a:p>
+            <a:r>
+              <a:rPr lang="zh-TW" altLang="en-US" dirty="0"/>
+              <a:t>要說明白 </a:t>
+            </a:r>
+            <a:r>
+              <a:rPr lang="en-US" altLang="zh-TW" dirty="0"/>
+              <a:t>threshold </a:t>
+            </a:r>
+            <a:r>
+              <a:rPr lang="zh-TW" altLang="en-US" dirty="0"/>
+              <a:t>的意思</a:t>
+            </a:r>
+            <a:endParaRPr lang="en-US" altLang="zh-TW" dirty="0"/>
+          </a:p>
+          <a:p>
+            <a:endParaRPr lang="en-US" altLang="zh-TW" dirty="0"/>
+          </a:p>
+          <a:p>
+            <a:r>
+              <a:rPr lang="en-US" altLang="zh-TW" dirty="0"/>
+              <a:t>Suitable threshold change as nodes move </a:t>
+            </a:r>
+            <a:r>
+              <a:rPr lang="zh-TW" altLang="en-US" dirty="0"/>
+              <a:t>這句話要重新安排說話順序</a:t>
+            </a:r>
+            <a:endParaRPr lang="en-US" altLang="zh-TW" dirty="0"/>
+          </a:p>
+          <a:p>
+            <a:endParaRPr lang="en-US" altLang="zh-TW" dirty="0"/>
+          </a:p>
+          <a:p>
+            <a:r>
+              <a:rPr lang="en-US" altLang="zh-TW" dirty="0"/>
+              <a:t>---</a:t>
+            </a:r>
+          </a:p>
+          <a:p>
+            <a:endParaRPr lang="en-US" altLang="zh-TW" dirty="0"/>
+          </a:p>
+          <a:p>
+            <a:r>
+              <a:rPr lang="zh-TW" altLang="en-US" dirty="0"/>
+              <a:t>要知道原本的人都怎麼設定</a:t>
+            </a:r>
+            <a:endParaRPr lang="en-US" altLang="zh-TW" dirty="0"/>
+          </a:p>
+          <a:p>
+            <a:endParaRPr lang="en-US" altLang="zh-TW" dirty="0"/>
+          </a:p>
+          <a:p>
+            <a:endParaRPr lang="en-US" altLang="zh-TW" dirty="0"/>
+          </a:p>
+          <a:p>
+            <a:r>
+              <a:rPr lang="zh-TW" altLang="en-US" dirty="0"/>
+              <a:t>移動不移動和調整 </a:t>
+            </a:r>
+            <a:r>
+              <a:rPr lang="en-US" altLang="zh-TW" dirty="0" err="1"/>
+              <a:t>rts</a:t>
+            </a:r>
+            <a:r>
+              <a:rPr lang="en-US" altLang="zh-TW" dirty="0"/>
+              <a:t> threshold </a:t>
+            </a:r>
+            <a:r>
+              <a:rPr lang="zh-TW" altLang="en-US" dirty="0"/>
+              <a:t>的關聯</a:t>
+            </a:r>
+            <a:endParaRPr lang="en-US" altLang="zh-TW" dirty="0"/>
+          </a:p>
+          <a:p>
+            <a:endParaRPr lang="en-US" altLang="zh-TW" dirty="0"/>
+          </a:p>
+          <a:p>
+            <a:r>
+              <a:rPr lang="zh-TW" altLang="en-US" dirty="0"/>
+              <a:t>我調整 </a:t>
+            </a:r>
+            <a:r>
+              <a:rPr lang="en-US" altLang="zh-TW" dirty="0"/>
+              <a:t>threshold </a:t>
+            </a:r>
+            <a:r>
+              <a:rPr lang="zh-TW" altLang="en-US" dirty="0"/>
+              <a:t>的話有什麼得失</a:t>
+            </a:r>
+            <a:endParaRPr lang="en-US" altLang="zh-TW" dirty="0"/>
+          </a:p>
+          <a:p>
+            <a:endParaRPr lang="en-US" altLang="zh-TW" dirty="0"/>
+          </a:p>
+          <a:p>
+            <a:r>
+              <a:rPr lang="en-US" altLang="zh-TW" dirty="0"/>
+              <a:t>---</a:t>
+            </a:r>
+          </a:p>
+          <a:p>
+            <a:endParaRPr lang="zh-TW" altLang="en-US" dirty="0"/>
+          </a:p>
+        </p:txBody>
+      </p:sp>
+      <p:sp>
+        <p:nvSpPr>
+          <p:cNvPr id="4" name="投影片編號版面配置區 3"/>
+          <p:cNvSpPr>
+            <a:spLocks noGrp="1"/>
+          </p:cNvSpPr>
+          <p:nvPr>
+            <p:ph type="sldNum" sz="quarter" idx="5"/>
+          </p:nvPr>
+        </p:nvSpPr>
+        <p:spPr/>
+        <p:txBody>
+          <a:bodyPr/>
+          <a:lstStyle/>
+          <a:p>
+            <a:endParaRPr lang="zh-TW" altLang="en-US"/>
+          </a:p>
+        </p:txBody>
+      </p:sp>
+    </p:spTree>
+    <p:extLst>
+      <p:ext uri="{BB962C8B-B14F-4D97-AF65-F5344CB8AC3E}">
+        <p14:creationId xmlns:p14="http://schemas.microsoft.com/office/powerpoint/2010/main" val="1318845328"/>
+      </p:ext>
+    </p:extLst>
+  </p:cSld>
+  <p:clrMapOvr>
+    <a:masterClrMapping/>
+  </p:clrMapOvr>
+</p:notes>
+</file>
+
+<file path=ppt/notesSlides/notesSlide6.xml><?xml version="1.0" encoding="utf-8"?>
+<p:notes xmlns:a="http://schemas.openxmlformats.org/drawingml/2006/main" xmlns:r="http://schemas.openxmlformats.org/officeDocument/2006/relationships" xmlns:p="http://schemas.openxmlformats.org/presentationml/2006/main">
+  <p:cSld>
+    <p:spTree>
+      <p:nvGrpSpPr>
+        <p:cNvPr id="1" name=""/>
+        <p:cNvGrpSpPr/>
+        <p:nvPr/>
+      </p:nvGrpSpPr>
+      <p:grpSpPr>
+        <a:xfrm>
+          <a:off x="0" y="0"/>
+          <a:ext cx="0" cy="0"/>
+          <a:chOff x="0" y="0"/>
+          <a:chExt cx="0" cy="0"/>
+        </a:xfrm>
+      </p:grpSpPr>
+      <p:sp>
+        <p:nvSpPr>
+          <p:cNvPr id="2" name="投影片影像版面配置區 1"/>
+          <p:cNvSpPr>
+            <a:spLocks noGrp="1" noRot="1" noChangeAspect="1"/>
+          </p:cNvSpPr>
+          <p:nvPr>
+            <p:ph type="sldImg"/>
+          </p:nvPr>
+        </p:nvSpPr>
+        <p:spPr/>
+      </p:sp>
+      <p:sp>
+        <p:nvSpPr>
+          <p:cNvPr id="3" name="備忘稿版面配置區 2"/>
+          <p:cNvSpPr>
+            <a:spLocks noGrp="1"/>
+          </p:cNvSpPr>
+          <p:nvPr>
+            <p:ph type="body" idx="1"/>
+          </p:nvPr>
+        </p:nvSpPr>
+        <p:spPr/>
+        <p:txBody>
+          <a:bodyPr/>
+          <a:lstStyle/>
+          <a:p>
+            <a:r>
+              <a:rPr lang="zh-TW" altLang="en-US" dirty="0"/>
+              <a:t>要加上前面為什麼有人要調整 </a:t>
+            </a:r>
+            <a:r>
+              <a:rPr lang="en-US" altLang="zh-TW" dirty="0" err="1"/>
+              <a:t>rts</a:t>
+            </a:r>
+            <a:r>
+              <a:rPr lang="en-US" altLang="zh-TW" dirty="0"/>
+              <a:t> threshold</a:t>
+            </a:r>
+          </a:p>
+          <a:p>
+            <a:endParaRPr lang="en-US" altLang="zh-TW" dirty="0"/>
+          </a:p>
+          <a:p>
+            <a:endParaRPr lang="en-US" altLang="zh-TW" dirty="0"/>
+          </a:p>
+          <a:p>
+            <a:endParaRPr lang="en-US" altLang="zh-TW" dirty="0"/>
+          </a:p>
+          <a:p>
+            <a:r>
+              <a:rPr lang="en-US" altLang="zh-TW" dirty="0"/>
+              <a:t>Aware </a:t>
+            </a:r>
+            <a:r>
+              <a:rPr lang="en-US" altLang="zh-TW" dirty="0" err="1"/>
+              <a:t>sta</a:t>
+            </a:r>
+            <a:r>
+              <a:rPr lang="en-US" altLang="zh-TW" dirty="0"/>
+              <a:t> location </a:t>
+            </a:r>
+            <a:r>
+              <a:rPr lang="zh-TW" altLang="en-US" dirty="0"/>
+              <a:t>是比 </a:t>
+            </a:r>
+            <a:r>
+              <a:rPr lang="en-US" altLang="zh-TW" dirty="0"/>
+              <a:t>Move </a:t>
+            </a:r>
+            <a:r>
+              <a:rPr lang="zh-TW" altLang="en-US" dirty="0"/>
+              <a:t>正確的說法</a:t>
+            </a:r>
+            <a:endParaRPr lang="en-US" altLang="zh-TW" dirty="0"/>
+          </a:p>
+          <a:p>
+            <a:endParaRPr lang="en-US" altLang="zh-TW" dirty="0"/>
+          </a:p>
+          <a:p>
+            <a:r>
+              <a:rPr lang="en-US" altLang="zh-TW" dirty="0"/>
+              <a:t>----</a:t>
+            </a:r>
+          </a:p>
+          <a:p>
+            <a:r>
+              <a:rPr lang="zh-TW" altLang="en-US" dirty="0"/>
+              <a:t>論文都很舊 </a:t>
+            </a:r>
+            <a:r>
+              <a:rPr lang="en-US" altLang="zh-TW" dirty="0"/>
+              <a:t>2006</a:t>
+            </a:r>
+            <a:r>
+              <a:rPr lang="zh-TW" altLang="en-US" dirty="0"/>
+              <a:t>年</a:t>
+            </a:r>
+          </a:p>
+        </p:txBody>
+      </p:sp>
+      <p:sp>
+        <p:nvSpPr>
+          <p:cNvPr id="4" name="投影片編號版面配置區 3"/>
+          <p:cNvSpPr>
+            <a:spLocks noGrp="1"/>
+          </p:cNvSpPr>
+          <p:nvPr>
+            <p:ph type="sldNum" sz="quarter" idx="5"/>
+          </p:nvPr>
+        </p:nvSpPr>
+        <p:spPr/>
+        <p:txBody>
+          <a:bodyPr/>
+          <a:lstStyle/>
+          <a:p>
+            <a:endParaRPr lang="zh-TW" altLang="en-US"/>
+          </a:p>
+        </p:txBody>
+      </p:sp>
+    </p:spTree>
+    <p:extLst>
+      <p:ext uri="{BB962C8B-B14F-4D97-AF65-F5344CB8AC3E}">
+        <p14:creationId xmlns:p14="http://schemas.microsoft.com/office/powerpoint/2010/main" val="3997921233"/>
+      </p:ext>
+    </p:extLst>
+  </p:cSld>
+  <p:clrMapOvr>
+    <a:masterClrMapping/>
+  </p:clrMapOvr>
+</p:notes>
+</file>
+
+<file path=ppt/notesSlides/notesSlide7.xml><?xml version="1.0" encoding="utf-8"?>
+<p:notes xmlns:a="http://schemas.openxmlformats.org/drawingml/2006/main" xmlns:r="http://schemas.openxmlformats.org/officeDocument/2006/relationships" xmlns:p="http://schemas.openxmlformats.org/presentationml/2006/main">
+  <p:cSld>
+    <p:spTree>
+      <p:nvGrpSpPr>
+        <p:cNvPr id="1" name=""/>
+        <p:cNvGrpSpPr/>
+        <p:nvPr/>
+      </p:nvGrpSpPr>
+      <p:grpSpPr>
+        <a:xfrm>
+          <a:off x="0" y="0"/>
+          <a:ext cx="0" cy="0"/>
+          <a:chOff x="0" y="0"/>
+          <a:chExt cx="0" cy="0"/>
+        </a:xfrm>
+      </p:grpSpPr>
+      <p:sp>
+        <p:nvSpPr>
+          <p:cNvPr id="2" name="Slide Image Placeholder 1"/>
+          <p:cNvSpPr>
+            <a:spLocks noGrp="1" noRot="1" noChangeAspect="1"/>
+          </p:cNvSpPr>
+          <p:nvPr>
+            <p:ph type="sldImg"/>
+          </p:nvPr>
+        </p:nvSpPr>
+        <p:spPr/>
+        <p:txBody>
+          <a:bodyPr/>
+          <a:lstStyle/>
+          <a:p>
+            <a:endParaRPr lang="zh-TW" altLang="en-US"/>
+          </a:p>
+        </p:txBody>
+      </p:sp>
+      <p:sp>
+        <p:nvSpPr>
+          <p:cNvPr id="3" name="Notes Placeholder 2"/>
+          <p:cNvSpPr>
+            <a:spLocks noGrp="1"/>
+          </p:cNvSpPr>
+          <p:nvPr>
+            <p:ph type="body" idx="1"/>
+          </p:nvPr>
+        </p:nvSpPr>
+        <p:spPr/>
+        <p:txBody>
+          <a:bodyPr/>
+          <a:lstStyle/>
+          <a:p>
+            <a:r>
+              <a:rPr dirty="0" err="1"/>
+              <a:t>只能控制</a:t>
+            </a:r>
+            <a:r>
+              <a:rPr dirty="0"/>
+              <a:t> AP </a:t>
+            </a:r>
+            <a:r>
+              <a:rPr dirty="0" err="1"/>
+              <a:t>side的RTS</a:t>
+            </a:r>
+            <a:r>
+              <a:rPr dirty="0"/>
+              <a:t> </a:t>
+            </a:r>
+            <a:r>
+              <a:rPr dirty="0" err="1"/>
+              <a:t>threshold是問題嗎</a:t>
+            </a:r>
+            <a:r>
+              <a:rPr dirty="0"/>
+              <a:t>?</a:t>
+            </a:r>
+            <a:endParaRPr lang="en-US" dirty="0"/>
+          </a:p>
+          <a:p>
+            <a:endParaRPr lang="en-US" dirty="0"/>
+          </a:p>
+          <a:p>
+            <a:endParaRPr lang="en-US" dirty="0"/>
+          </a:p>
+          <a:p>
+            <a:endParaRPr dirty="0"/>
+          </a:p>
+        </p:txBody>
+      </p:sp>
+      <p:sp>
+        <p:nvSpPr>
+          <p:cNvPr id="4" name="Slide Number Placeholder 3"/>
+          <p:cNvSpPr>
+            <a:spLocks noGrp="1"/>
+          </p:cNvSpPr>
+          <p:nvPr>
+            <p:ph type="sldNum" idx="5"/>
+          </p:nvPr>
+        </p:nvSpPr>
+        <p:spPr/>
+        <p:txBody>
+          <a:bodyPr/>
+          <a:lstStyle/>
+          <a:p>
+            <a:endParaRPr/>
+          </a:p>
+        </p:txBody>
+      </p:sp>
+    </p:spTree>
+  </p:cSld>
+  <p:clrMapOvr>
+    <a:masterClrMapping/>
+  </p:clrMapOvr>
+</p:notes>
+</file>
+
+<file path=ppt/notesSlides/notesSlide8.xml><?xml version="1.0" encoding="utf-8"?>
+<p:notes xmlns:a="http://schemas.openxmlformats.org/drawingml/2006/main" xmlns:r="http://schemas.openxmlformats.org/officeDocument/2006/relationships" xmlns:p="http://schemas.openxmlformats.org/presentationml/2006/main">
+  <p:cSld>
+    <p:spTree>
+      <p:nvGrpSpPr>
+        <p:cNvPr id="1" name=""/>
+        <p:cNvGrpSpPr/>
+        <p:nvPr/>
+      </p:nvGrpSpPr>
+      <p:grpSpPr>
+        <a:xfrm>
+          <a:off x="0" y="0"/>
+          <a:ext cx="0" cy="0"/>
+          <a:chOff x="0" y="0"/>
+          <a:chExt cx="0" cy="0"/>
+        </a:xfrm>
+      </p:grpSpPr>
+      <p:sp>
+        <p:nvSpPr>
+          <p:cNvPr id="2" name="Slide Image Placeholder 1"/>
+          <p:cNvSpPr>
+            <a:spLocks noGrp="1" noRot="1" noChangeAspect="1"/>
+          </p:cNvSpPr>
+          <p:nvPr>
+            <p:ph type="sldImg"/>
+          </p:nvPr>
+        </p:nvSpPr>
+        <p:spPr/>
+        <p:txBody>
+          <a:bodyPr/>
+          <a:lstStyle/>
+          <a:p>
+            <a:endParaRPr lang="zh-TW" altLang="en-US"/>
+          </a:p>
+        </p:txBody>
+      </p:sp>
+      <p:sp>
+        <p:nvSpPr>
+          <p:cNvPr id="3" name="Notes Placeholder 2"/>
+          <p:cNvSpPr>
+            <a:spLocks noGrp="1"/>
+          </p:cNvSpPr>
+          <p:nvPr>
+            <p:ph type="body" idx="1"/>
+          </p:nvPr>
+        </p:nvSpPr>
+        <p:spPr/>
+        <p:txBody>
+          <a:bodyPr/>
+          <a:lstStyle/>
+          <a:p>
+            <a:endParaRPr/>
+          </a:p>
+        </p:txBody>
+      </p:sp>
+      <p:sp>
+        <p:nvSpPr>
+          <p:cNvPr id="4" name="Slide Number Placeholder 3"/>
+          <p:cNvSpPr>
+            <a:spLocks noGrp="1"/>
+          </p:cNvSpPr>
+          <p:nvPr>
+            <p:ph type="sldNum" idx="5"/>
+          </p:nvPr>
+        </p:nvSpPr>
+        <p:spPr/>
+        <p:txBody>
+          <a:bodyPr/>
+          <a:lstStyle/>
+          <a:p>
+            <a:endParaRPr/>
+          </a:p>
+        </p:txBody>
+      </p:sp>
+    </p:spTree>
+  </p:cSld>
+  <p:clrMapOvr>
+    <a:masterClrMapping/>
+  </p:clrMapOvr>
+</p:notes>
+</file>
+
+<file path=ppt/notesSlides/notesSlide9.xml><?xml version="1.0" encoding="utf-8"?>
+<p:notes xmlns:a="http://schemas.openxmlformats.org/drawingml/2006/main" xmlns:r="http://schemas.openxmlformats.org/officeDocument/2006/relationships" xmlns:p="http://schemas.openxmlformats.org/presentationml/2006/main">
+  <p:cSld>
+    <p:spTree>
+      <p:nvGrpSpPr>
+        <p:cNvPr id="1" name="">
+          <a:extLst>
+            <a:ext uri="{FF2B5EF4-FFF2-40B4-BE49-F238E27FC236}">
+              <a16:creationId xmlns:a16="http://schemas.microsoft.com/office/drawing/2014/main" id="{BCE7CF6E-5A4E-6AF1-66DF-5993D896FBBD}"/>
+            </a:ext>
+          </a:extLst>
+        </p:cNvPr>
+        <p:cNvGrpSpPr/>
+        <p:nvPr/>
+      </p:nvGrpSpPr>
+      <p:grpSpPr>
+        <a:xfrm>
+          <a:off x="0" y="0"/>
+          <a:ext cx="0" cy="0"/>
+          <a:chOff x="0" y="0"/>
+          <a:chExt cx="0" cy="0"/>
+        </a:xfrm>
+      </p:grpSpPr>
+      <p:sp>
+        <p:nvSpPr>
+          <p:cNvPr id="2" name="Slide Image Placeholder 1">
+            <a:extLst>
+              <a:ext uri="{FF2B5EF4-FFF2-40B4-BE49-F238E27FC236}">
+                <a16:creationId xmlns:a16="http://schemas.microsoft.com/office/drawing/2014/main" id="{264772C8-66E1-A5C9-9D59-998412A923BD}"/>
+              </a:ext>
+            </a:extLst>
+          </p:cNvPr>
+          <p:cNvSpPr>
+            <a:spLocks noGrp="1" noRot="1" noChangeAspect="1"/>
+          </p:cNvSpPr>
+          <p:nvPr>
+            <p:ph type="sldImg"/>
+          </p:nvPr>
+        </p:nvSpPr>
+        <p:spPr/>
+        <p:txBody>
+          <a:bodyPr/>
+          <a:lstStyle/>
+          <a:p>
+            <a:endParaRPr lang="zh-TW" altLang="en-US"/>
+          </a:p>
+        </p:txBody>
+      </p:sp>
+      <p:sp>
+        <p:nvSpPr>
+          <p:cNvPr id="3" name="Notes Placeholder 2">
+            <a:extLst>
+              <a:ext uri="{FF2B5EF4-FFF2-40B4-BE49-F238E27FC236}">
+                <a16:creationId xmlns:a16="http://schemas.microsoft.com/office/drawing/2014/main" id="{230B2AB3-43E7-54D6-9A95-9E3E5F21B8A8}"/>
+              </a:ext>
+            </a:extLst>
+          </p:cNvPr>
+          <p:cNvSpPr>
+            <a:spLocks noGrp="1"/>
+          </p:cNvSpPr>
+          <p:nvPr>
+            <p:ph type="body" idx="1"/>
+          </p:nvPr>
+        </p:nvSpPr>
+        <p:spPr/>
+        <p:txBody>
+          <a:bodyPr/>
+          <a:lstStyle/>
+          <a:p>
+            <a:r>
+              <a:rPr lang="zh-TW" altLang="en-US" dirty="0"/>
+              <a:t>天線可以調嗎</a:t>
+            </a:r>
+            <a:r>
+              <a:rPr lang="en-US" altLang="zh-TW" dirty="0"/>
+              <a:t>?</a:t>
+            </a:r>
+            <a:r>
+              <a:rPr lang="zh-TW" altLang="en-US" dirty="0"/>
+              <a:t> 可以調的話會改變 </a:t>
+            </a:r>
+            <a:r>
+              <a:rPr lang="en-US" altLang="zh-TW" dirty="0"/>
+              <a:t>AoA </a:t>
+            </a:r>
+            <a:endParaRPr dirty="0"/>
+          </a:p>
+        </p:txBody>
+      </p:sp>
+      <p:sp>
+        <p:nvSpPr>
+          <p:cNvPr id="4" name="Slide Number Placeholder 3">
+            <a:extLst>
+              <a:ext uri="{FF2B5EF4-FFF2-40B4-BE49-F238E27FC236}">
+                <a16:creationId xmlns:a16="http://schemas.microsoft.com/office/drawing/2014/main" id="{EE04830D-E81E-086A-B2DA-F0D3D9CD97D0}"/>
+              </a:ext>
+            </a:extLst>
+          </p:cNvPr>
+          <p:cNvSpPr>
+            <a:spLocks noGrp="1"/>
+          </p:cNvSpPr>
+          <p:nvPr>
+            <p:ph type="sldNum" idx="5"/>
+          </p:nvPr>
+        </p:nvSpPr>
+        <p:spPr/>
+        <p:txBody>
+          <a:bodyPr/>
+          <a:lstStyle/>
+          <a:p>
+            <a:endParaRPr/>
+          </a:p>
+        </p:txBody>
+      </p:sp>
+    </p:spTree>
+    <p:extLst>
+      <p:ext uri="{BB962C8B-B14F-4D97-AF65-F5344CB8AC3E}">
+        <p14:creationId xmlns:p14="http://schemas.microsoft.com/office/powerpoint/2010/main" val="1800024884"/>
       </p:ext>
     </p:extLst>
   </p:cSld>
@@ -9739,12 +10147,16 @@
           <a:lstStyle/>
           <a:p>
             <a:r>
-              <a:rPr sz="4000" dirty="0" err="1"/>
-              <a:t>AoA</a:t>
-            </a:r>
-            <a:r>
               <a:rPr sz="4000" dirty="0"/>
-              <a:t>-Assisted Dynamic RTS Threshold Adaptation for Hidden-Node Risk Mitigation in</a:t>
+              <a:t>AoA-Assisted Dynamic RTS Threshold Adaptation for Hidden-Node</a:t>
+            </a:r>
+            <a:r>
+              <a:rPr lang="zh-TW" altLang="en-US" sz="4000" dirty="0"/>
+              <a:t> </a:t>
+            </a:r>
+            <a:r>
+              <a:rPr sz="4000" dirty="0"/>
+              <a:t>in</a:t>
             </a:r>
             <a:r>
               <a:rPr lang="en-US" sz="4000" dirty="0"/>
@@ -18132,7 +18544,27 @@
             </a:r>
             <a:r>
               <a:rPr lang="zh-TW" altLang="zh-TW" dirty="0"/>
-              <a:t>akes nearby nodes defer, reducing hidden-node collisions</a:t>
+              <a:t>akes nearby</a:t>
+            </a:r>
+            <a:r>
+              <a:rPr lang="zh-TW" altLang="en-US" dirty="0"/>
+              <a:t> </a:t>
+            </a:r>
+            <a:r>
+              <a:rPr lang="en-US" altLang="zh-TW" dirty="0"/>
+              <a:t>and hidden</a:t>
+            </a:r>
+            <a:r>
+              <a:rPr lang="zh-TW" altLang="zh-TW" dirty="0"/>
+              <a:t> nodes defer, reducing</a:t>
+            </a:r>
+            <a:r>
+              <a:rPr lang="en-US" altLang="zh-TW" dirty="0"/>
+              <a:t> </a:t>
+            </a:r>
+            <a:r>
+              <a:rPr lang="zh-TW" altLang="zh-TW" dirty="0"/>
+              <a:t>collisions</a:t>
             </a:r>
             <a:endParaRPr lang="en-US" altLang="zh-TW" dirty="0"/>
           </a:p>
